--- a/docs/lectures/03_06_lecture/regressions.pptx
+++ b/docs/lectures/03_06_lecture/regressions.pptx
@@ -3361,7 +3361,7 @@
             </a:pPr>
             <a:r>
               <a:rPr/>
-              <a:t>2026-07-02</a:t>
+              <a:t>2026-07-03</a:t>
             </a:r>
           </a:p>
         </p:txBody>

--- a/docs/lectures/03_06_lecture/regressions.pptx
+++ b/docs/lectures/03_06_lecture/regressions.pptx
@@ -27,6 +27,20 @@
     <p:sldId id="275" r:id="rId21"/>
     <p:sldId id="276" r:id="rId22"/>
     <p:sldId id="277" r:id="rId23"/>
+    <p:sldId id="278" r:id="rId24"/>
+    <p:sldId id="279" r:id="rId25"/>
+    <p:sldId id="280" r:id="rId26"/>
+    <p:sldId id="281" r:id="rId27"/>
+    <p:sldId id="282" r:id="rId28"/>
+    <p:sldId id="283" r:id="rId29"/>
+    <p:sldId id="284" r:id="rId30"/>
+    <p:sldId id="285" r:id="rId31"/>
+    <p:sldId id="286" r:id="rId32"/>
+    <p:sldId id="287" r:id="rId33"/>
+    <p:sldId id="288" r:id="rId34"/>
+    <p:sldId id="289" r:id="rId35"/>
+    <p:sldId id="290" r:id="rId36"/>
+    <p:sldId id="291" r:id="rId37"/>
   </p:sldIdLst>
   <p:sldSz cx="9144000" cy="5143500" type="screen16x9"/>
   <p:notesSz cx="6858000" cy="9144000"/>
@@ -3361,7 +3375,7 @@
             </a:pPr>
             <a:r>
               <a:rPr/>
-              <a:t>2026-07-03</a:t>
+              <a:t>2026-07-04</a:t>
             </a:r>
           </a:p>
         </p:txBody>
@@ -3413,7 +3427,7 @@
             </a:pPr>
             <a:r>
               <a:rPr/>
-              <a:t>Load Libraries and Data</a:t>
+              <a:t>R² — How Much Does X Explain?</a:t>
             </a:r>
           </a:p>
         </p:txBody>
@@ -3433,164 +3447,6 @@
           <a:bodyPr/>
           <a:lstStyle/>
           <a:p>
-            <a:pPr lvl="0" indent="0">
-              <a:buNone/>
-            </a:pPr>
-            <a:r>
-              <a:rPr>
-                <a:solidFill>
-                  <a:srgbClr val="5E5E5E"/>
-                </a:solidFill>
-                <a:latin typeface="Courier"/>
-              </a:rPr>
-              <a:t># Load packages at the top of the script ---------------</a:t>
-            </a:r>
-            <a:br/>
-            <a:r>
-              <a:rPr>
-                <a:solidFill>
-                  <a:srgbClr val="4758AB"/>
-                </a:solidFill>
-                <a:latin typeface="Courier"/>
-              </a:rPr>
-              <a:t>library</a:t>
-            </a:r>
-            <a:r>
-              <a:rPr>
-                <a:solidFill>
-                  <a:srgbClr val="003B4F"/>
-                </a:solidFill>
-                <a:latin typeface="Courier"/>
-              </a:rPr>
-              <a:t>(readxl) </a:t>
-            </a:r>
-            <a:r>
-              <a:rPr>
-                <a:solidFill>
-                  <a:srgbClr val="5E5E5E"/>
-                </a:solidFill>
-                <a:latin typeface="Courier"/>
-              </a:rPr>
-              <a:t># reading Excel files</a:t>
-            </a:r>
-            <a:br/>
-            <a:r>
-              <a:rPr>
-                <a:solidFill>
-                  <a:srgbClr val="4758AB"/>
-                </a:solidFill>
-                <a:latin typeface="Courier"/>
-              </a:rPr>
-              <a:t>library</a:t>
-            </a:r>
-            <a:r>
-              <a:rPr>
-                <a:solidFill>
-                  <a:srgbClr val="003B4F"/>
-                </a:solidFill>
-                <a:latin typeface="Courier"/>
-              </a:rPr>
-              <a:t>(tidyverse) </a:t>
-            </a:r>
-            <a:r>
-              <a:rPr>
-                <a:solidFill>
-                  <a:srgbClr val="5E5E5E"/>
-                </a:solidFill>
-                <a:latin typeface="Courier"/>
-              </a:rPr>
-              <a:t># data manipulation + ggplot2</a:t>
-            </a:r>
-            <a:br/>
-            <a:r>
-              <a:rPr>
-                <a:solidFill>
-                  <a:srgbClr val="4758AB"/>
-                </a:solidFill>
-                <a:latin typeface="Courier"/>
-              </a:rPr>
-              <a:t>library</a:t>
-            </a:r>
-            <a:r>
-              <a:rPr>
-                <a:solidFill>
-                  <a:srgbClr val="003B4F"/>
-                </a:solidFill>
-                <a:latin typeface="Courier"/>
-              </a:rPr>
-              <a:t>(skimr) </a:t>
-            </a:r>
-            <a:r>
-              <a:rPr>
-                <a:solidFill>
-                  <a:srgbClr val="5E5E5E"/>
-                </a:solidFill>
-                <a:latin typeface="Courier"/>
-              </a:rPr>
-              <a:t># fast data overview</a:t>
-            </a:r>
-          </a:p>
-          <a:p>
-            <a:pPr lvl="0" indent="0">
-              <a:buNone/>
-            </a:pPr>
-            <a:r>
-              <a:rPr>
-                <a:solidFill>
-                  <a:srgbClr val="5E5E5E"/>
-                </a:solidFill>
-                <a:latin typeface="Courier"/>
-              </a:rPr>
-              <a:t># Load the paper calibration data ----------------------</a:t>
-            </a:r>
-            <a:br/>
-            <a:r>
-              <a:rPr>
-                <a:solidFill>
-                  <a:srgbClr val="003B4F"/>
-                </a:solidFill>
-                <a:latin typeface="Courier"/>
-              </a:rPr>
-              <a:t>paper_df &lt;- </a:t>
-            </a:r>
-            <a:r>
-              <a:rPr>
-                <a:solidFill>
-                  <a:srgbClr val="4758AB"/>
-                </a:solidFill>
-                <a:latin typeface="Courier"/>
-              </a:rPr>
-              <a:t>read_excel</a:t>
-            </a:r>
-            <a:r>
-              <a:rPr>
-                <a:solidFill>
-                  <a:srgbClr val="003B4F"/>
-                </a:solidFill>
-                <a:latin typeface="Courier"/>
-              </a:rPr>
-              <a:t>(</a:t>
-            </a:r>
-            <a:r>
-              <a:rPr>
-                <a:solidFill>
-                  <a:srgbClr val="20794D"/>
-                </a:solidFill>
-                <a:latin typeface="Courier"/>
-              </a:rPr>
-              <a:t>"data/paper_area_weights.xlsx"</a:t>
-            </a:r>
-            <a:r>
-              <a:rPr>
-                <a:solidFill>
-                  <a:srgbClr val="003B4F"/>
-                </a:solidFill>
-                <a:latin typeface="Courier"/>
-              </a:rPr>
-              <a:t>)</a:t>
-            </a:r>
-          </a:p>
-          <a:p>
             <a:pPr lvl="0" indent="0" marL="1270000">
               <a:buNone/>
             </a:pPr>
@@ -3604,26 +3460,20 @@
               <a:buNone/>
             </a:pPr>
             <a:r>
+              <a:rPr sz="2000" b="1"/>
+              <a:t>🔮 Predict first:</a:t>
+            </a:r>
+            <a:r>
               <a:rPr sz="2000"/>
-              <a:t>The file </a:t>
-            </a:r>
-            <a:r>
-              <a:rPr sz="2000">
-                <a:latin typeface="Courier"/>
-              </a:rPr>
-              <a:t>paper_area_weights.xlsx</a:t>
+              <a:t> Paper of uniform stock has constant area-per-gram. Before you see any output, predict: will R² be near </a:t>
+            </a:r>
+            <a:r>
+              <a:rPr sz="2000" b="1"/>
+              <a:t>0, 0.5, or 1</a:t>
             </a:r>
             <a:r>
               <a:rPr sz="2000"/>
-              <a:t> contains 118 paper squares of </a:t>
-            </a:r>
-            <a:r>
-              <a:rPr sz="2000" b="1"/>
-              <a:t>known area</a:t>
-            </a:r>
-            <a:r>
-              <a:rPr sz="2000"/>
-              <a:t> (1–567 cm²) with their measured masses. This is the calibration dataset we use to predict leaf area from a tracing weight.</a:t>
+              <a:t>?</a:t>
             </a:r>
           </a:p>
         </p:txBody>
@@ -3634,6 +3484,1426 @@
 </file>
 
 <file path=ppt/slides/slide11.xml><?xml version="1.0" encoding="utf-8"?>
+<p:sld xmlns:a="http://schemas.openxmlformats.org/drawingml/2006/main" xmlns:r="http://schemas.openxmlformats.org/officeDocument/2006/relationships" xmlns:p="http://schemas.openxmlformats.org/presentationml/2006/main">
+  <p:cSld>
+    <p:spTree>
+      <p:nvGrpSpPr>
+        <p:cNvPr id="1" name=""/>
+        <p:cNvGrpSpPr/>
+        <p:nvPr/>
+      </p:nvGrpSpPr>
+      <p:grpSpPr>
+        <a:xfrm>
+          <a:off x="0" y="0"/>
+          <a:ext cx="0" cy="0"/>
+          <a:chOff x="0" y="0"/>
+          <a:chExt cx="0" cy="0"/>
+        </a:xfrm>
+      </p:grpSpPr>
+      <mc:AlternateContent xmlns:mc="http://schemas.openxmlformats.org/markup-compatibility/2006">
+        <mc:Choice xmlns:a14="http://schemas.microsoft.com/office/drawing/2010/main" Requires="a14">
+          <p:sp>
+            <p:nvSpPr>
+              <p:cNvPr id="3" name="Text Placeholder 2"/>
+              <p:cNvSpPr>
+                <a:spLocks noGrp="1"/>
+              </p:cNvSpPr>
+              <p:nvPr>
+                <p:ph idx="1" type="body"/>
+              </p:nvPr>
+            </p:nvSpPr>
+            <p:spPr/>
+            <p:txBody>
+              <a:bodyPr/>
+              <a:lstStyle/>
+              <a:p>
+                <a:pPr lvl="0" indent="0" marL="0">
+                  <a:buNone/>
+                </a:pPr>
+                <a14:m>
+                  <m:oMathPara xmlns:m="http://schemas.openxmlformats.org/officeDocument/2006/math">
+                    <m:oMathParaPr>
+                      <m:jc m:val="center"/>
+                    </m:oMathParaPr>
+                    <m:oMath>
+                      <m:sSup>
+                        <m:e>
+                          <m:r>
+                            <m:t>R</m:t>
+                          </m:r>
+                        </m:e>
+                        <m:sup>
+                          <m:r>
+                            <m:t>2</m:t>
+                          </m:r>
+                        </m:sup>
+                      </m:sSup>
+                      <m:r>
+                        <m:rPr>
+                          <m:sty m:val="p"/>
+                        </m:rPr>
+                        <m:t>=</m:t>
+                      </m:r>
+                      <m:f>
+                        <m:fPr>
+                          <m:type m:val="bar"/>
+                        </m:fPr>
+                        <m:num>
+                          <m:r>
+                            <m:t>S</m:t>
+                          </m:r>
+                          <m:sSub>
+                            <m:e>
+                              <m:r>
+                                <m:t>S</m:t>
+                              </m:r>
+                            </m:e>
+                            <m:sub>
+                              <m:r>
+                                <m:rPr>
+                                  <m:nor/>
+                                  <m:sty m:val="p"/>
+                                </m:rPr>
+                                <m:t>regression</m:t>
+                              </m:r>
+                            </m:sub>
+                          </m:sSub>
+                        </m:num>
+                        <m:den>
+                          <m:r>
+                            <m:t>S</m:t>
+                          </m:r>
+                          <m:sSub>
+                            <m:e>
+                              <m:r>
+                                <m:t>S</m:t>
+                              </m:r>
+                            </m:e>
+                            <m:sub>
+                              <m:r>
+                                <m:rPr>
+                                  <m:nor/>
+                                  <m:sty m:val="p"/>
+                                </m:rPr>
+                                <m:t>total</m:t>
+                              </m:r>
+                            </m:sub>
+                          </m:sSub>
+                        </m:den>
+                      </m:f>
+                      <m:r>
+                        <m:rPr>
+                          <m:sty m:val="p"/>
+                        </m:rPr>
+                        <m:t>=</m:t>
+                      </m:r>
+                      <m:r>
+                        <m:t>1</m:t>
+                      </m:r>
+                      <m:r>
+                        <m:rPr>
+                          <m:sty m:val="p"/>
+                        </m:rPr>
+                        <m:t>−</m:t>
+                      </m:r>
+                      <m:f>
+                        <m:fPr>
+                          <m:type m:val="bar"/>
+                        </m:fPr>
+                        <m:num>
+                          <m:r>
+                            <m:t>S</m:t>
+                          </m:r>
+                          <m:sSub>
+                            <m:e>
+                              <m:r>
+                                <m:t>S</m:t>
+                              </m:r>
+                            </m:e>
+                            <m:sub>
+                              <m:r>
+                                <m:rPr>
+                                  <m:nor/>
+                                  <m:sty m:val="p"/>
+                                </m:rPr>
+                                <m:t>residual</m:t>
+                              </m:r>
+                            </m:sub>
+                          </m:sSub>
+                        </m:num>
+                        <m:den>
+                          <m:r>
+                            <m:t>S</m:t>
+                          </m:r>
+                          <m:sSub>
+                            <m:e>
+                              <m:r>
+                                <m:t>S</m:t>
+                              </m:r>
+                            </m:e>
+                            <m:sub>
+                              <m:r>
+                                <m:rPr>
+                                  <m:nor/>
+                                  <m:sty m:val="p"/>
+                                </m:rPr>
+                                <m:t>total</m:t>
+                              </m:r>
+                            </m:sub>
+                          </m:sSub>
+                        </m:den>
+                      </m:f>
+                    </m:oMath>
+                  </m:oMathPara>
+                </a14:m>
+              </a:p>
+              <a:p>
+                <a:pPr lvl="0"/>
+                <a:r>
+                  <a:rPr b="1"/>
+                  <a:t>SS_total</a:t>
+                </a:r>
+                <a:r>
+                  <a:rPr/>
+                  <a:t> = total variation in Y around its mean</a:t>
+                </a:r>
+              </a:p>
+              <a:p>
+                <a:pPr lvl="0"/>
+                <a:r>
+                  <a:rPr b="1"/>
+                  <a:t>SS_regression</a:t>
+                </a:r>
+                <a:r>
+                  <a:rPr/>
+                  <a:t> = variation explained by X</a:t>
+                </a:r>
+              </a:p>
+              <a:p>
+                <a:pPr lvl="0"/>
+                <a:r>
+                  <a:rPr b="1"/>
+                  <a:t>SS_residual</a:t>
+                </a:r>
+                <a:r>
+                  <a:rPr/>
+                  <a:t> = variation </a:t>
+                </a:r>
+                <a:r>
+                  <a:rPr i="1"/>
+                  <a:t>not</a:t>
+                </a:r>
+                <a:r>
+                  <a:rPr/>
+                  <a:t> explained (scatter around the line)</a:t>
+                </a:r>
+              </a:p>
+              <a:p>
+                <a:pPr lvl="0" indent="0" marL="0">
+                  <a:buNone/>
+                </a:pPr>
+                <a:r>
+                  <a:rPr/>
+                  <a:t>R² ranges from 0 to 1:</a:t>
+                </a:r>
+              </a:p>
+            </p:txBody>
+          </p:sp>
+        </mc:Choice>
+      </mc:AlternateContent>
+      <p:graphicFrame>
+        <p:nvGraphicFramePr>
+          <p:cNvPr id="6" name="Content Placeholder 5"/>
+          <p:cNvGraphicFramePr>
+            <a:graphicFrameLocks noGrp="1"/>
+          </p:cNvGraphicFramePr>
+          <p:nvPr>
+            <p:ph idx="1"/>
+          </p:nvPr>
+        </p:nvGraphicFramePr>
+        <p:xfrm>
+          <a:off x="127000" y="1270000"/>
+          <a:ext cx="4432300" cy="3302000"/>
+        </p:xfrm>
+        <a:graphic>
+          <a:graphicData uri="http://schemas.openxmlformats.org/drawingml/2006/table">
+            <a:tbl>
+              <a:tblPr firstRow="1" bandRow="1">
+                <a:tableStyleId>{5C22544A-7EE6-4342-B048-85BDC9FD1C3A}</a:tableStyleId>
+              </a:tblPr>
+              <a:tblGrid>
+                <a:gridCol w="2209800"/>
+                <a:gridCol w="2209800"/>
+              </a:tblGrid>
+              <a:tr h="0">
+                <a:tc>
+                  <a:txBody>
+                    <a:bodyPr/>
+                    <a:lstStyle/>
+                    <a:p>
+                      <a:pPr lvl="0" indent="0" marL="0">
+                        <a:buNone/>
+                      </a:pPr>
+                      <a:r>
+                        <a:rPr/>
+                        <a:t>R²</a:t>
+                      </a:r>
+                    </a:p>
+                  </a:txBody>
+                  <a:tcPr/>
+                </a:tc>
+                <a:tc>
+                  <a:txBody>
+                    <a:bodyPr/>
+                    <a:lstStyle/>
+                    <a:p>
+                      <a:pPr lvl="0" indent="0" marL="0">
+                        <a:buNone/>
+                      </a:pPr>
+                      <a:r>
+                        <a:rPr/>
+                        <a:t>Interpretation</a:t>
+                      </a:r>
+                    </a:p>
+                  </a:txBody>
+                  <a:tcPr/>
+                </a:tc>
+              </a:tr>
+              <a:tr h="0">
+                <a:tc>
+                  <a:txBody>
+                    <a:bodyPr/>
+                    <a:lstStyle/>
+                    <a:p>
+                      <a:pPr lvl="0" indent="0" marL="0">
+                        <a:buNone/>
+                      </a:pPr>
+                      <a:r>
+                        <a:rPr/>
+                        <a:t>1.00</a:t>
+                      </a:r>
+                    </a:p>
+                  </a:txBody>
+                </a:tc>
+                <a:tc>
+                  <a:txBody>
+                    <a:bodyPr/>
+                    <a:lstStyle/>
+                    <a:p>
+                      <a:pPr lvl="0" indent="0" marL="0">
+                        <a:buNone/>
+                      </a:pPr>
+                      <a:r>
+                        <a:rPr/>
+                        <a:t>X explains all variation in Y</a:t>
+                      </a:r>
+                    </a:p>
+                  </a:txBody>
+                </a:tc>
+              </a:tr>
+              <a:tr h="0">
+                <a:tc>
+                  <a:txBody>
+                    <a:bodyPr/>
+                    <a:lstStyle/>
+                    <a:p>
+                      <a:pPr lvl="0" indent="0" marL="0">
+                        <a:buNone/>
+                      </a:pPr>
+                      <a:r>
+                        <a:rPr/>
+                        <a:t>0.85</a:t>
+                      </a:r>
+                    </a:p>
+                  </a:txBody>
+                </a:tc>
+                <a:tc>
+                  <a:txBody>
+                    <a:bodyPr/>
+                    <a:lstStyle/>
+                    <a:p>
+                      <a:pPr lvl="0" indent="0" marL="0">
+                        <a:buNone/>
+                      </a:pPr>
+                      <a:r>
+                        <a:rPr/>
+                        <a:t>X explains 85% of variation</a:t>
+                      </a:r>
+                    </a:p>
+                  </a:txBody>
+                </a:tc>
+              </a:tr>
+              <a:tr h="0">
+                <a:tc>
+                  <a:txBody>
+                    <a:bodyPr/>
+                    <a:lstStyle/>
+                    <a:p>
+                      <a:pPr lvl="0" indent="0" marL="0">
+                        <a:buNone/>
+                      </a:pPr>
+                      <a:r>
+                        <a:rPr/>
+                        <a:t>0.00</a:t>
+                      </a:r>
+                    </a:p>
+                  </a:txBody>
+                </a:tc>
+                <a:tc>
+                  <a:txBody>
+                    <a:bodyPr/>
+                    <a:lstStyle/>
+                    <a:p>
+                      <a:pPr lvl="0" indent="0" marL="0">
+                        <a:buNone/>
+                      </a:pPr>
+                      <a:r>
+                        <a:rPr/>
+                        <a:t>X explains nothing</a:t>
+                      </a:r>
+                    </a:p>
+                  </a:txBody>
+                </a:tc>
+              </a:tr>
+            </a:tbl>
+          </a:graphicData>
+        </a:graphic>
+      </p:graphicFrame>
+      <p:sp>
+        <p:nvSpPr>
+          <p:cNvPr id="4" name="Content Placeholder 3"/>
+          <p:cNvSpPr>
+            <a:spLocks noGrp="1"/>
+          </p:cNvSpPr>
+          <p:nvPr>
+            <p:ph idx="2" sz="half"/>
+          </p:nvPr>
+        </p:nvSpPr>
+        <p:spPr/>
+        <p:txBody>
+          <a:bodyPr/>
+          <a:lstStyle/>
+          <a:p>
+            <a:pPr lvl="0" indent="0" marL="0">
+              <a:buNone/>
+            </a:pPr>
+            <a:r>
+              <a:rPr/>
+              <a:t>📖 W&amp;S §17.4 p. 555</a:t>
+            </a:r>
+          </a:p>
+        </p:txBody>
+      </p:sp>
+      <p:sp>
+        <p:nvSpPr>
+          <p:cNvPr id="5" name="Text Placeholder 4"/>
+          <p:cNvSpPr>
+            <a:spLocks noGrp="1"/>
+          </p:cNvSpPr>
+          <p:nvPr>
+            <p:ph idx="3" sz="quarter" type="body"/>
+          </p:nvPr>
+        </p:nvSpPr>
+        <p:spPr/>
+        <p:txBody>
+          <a:bodyPr/>
+          <a:lstStyle/>
+          <a:p>
+            <a:pPr lvl="0" indent="0" marL="0">
+              <a:buNone/>
+            </a:pPr>
+            <a:r>
+              <a:rPr b="1"/>
+              <a:t>Our calibration data:</a:t>
+            </a:r>
+          </a:p>
+          <a:p>
+            <a:pPr lvl="0" indent="0" marL="0">
+              <a:buNone/>
+            </a:pPr>
+            <a:r>
+              <a:rPr/>
+              <a:t>Because paper has uniform density, mass and area are nearly perfectly linearly related.</a:t>
+            </a:r>
+          </a:p>
+          <a:p>
+            <a:pPr lvl="0" indent="0" marL="0">
+              <a:buNone/>
+            </a:pPr>
+            <a:r>
+              <a:rPr/>
+              <a:t>We expect R² ≈ 1.00.</a:t>
+            </a:r>
+          </a:p>
+          <a:p>
+            <a:pPr lvl="0" indent="0" marL="0">
+              <a:buNone/>
+            </a:pPr>
+            <a:r>
+              <a:rPr b="1"/>
+              <a:t>Important:</a:t>
+            </a:r>
+            <a:r>
+              <a:rPr/>
+              <a:t> R² tells you </a:t>
+            </a:r>
+            <a:r>
+              <a:rPr i="1"/>
+              <a:t>how well the line fits</a:t>
+            </a:r>
+            <a:r>
+              <a:rPr/>
+              <a:t> the data you have. It does not by itself tell you whether the relationship is statistically significant — that requires a test of the slope.</a:t>
+            </a:r>
+          </a:p>
+          <a:p>
+            <a:pPr lvl="0" indent="0" marL="0">
+              <a:buNone/>
+            </a:pPr>
+            <a:r>
+              <a:rPr/>
+              <a:t>A significant slope with a low R² is possible (weak but real relationship). In biology, R² values of 0.3–0.7 are common and meaningful.</a:t>
+            </a:r>
+          </a:p>
+        </p:txBody>
+      </p:sp>
+    </p:spTree>
+  </p:cSld>
+</p:sld>
+</file>
+
+<file path=ppt/slides/slide12.xml><?xml version="1.0" encoding="utf-8"?>
+<p:sld xmlns:a="http://schemas.openxmlformats.org/drawingml/2006/main" xmlns:r="http://schemas.openxmlformats.org/officeDocument/2006/relationships" xmlns:p="http://schemas.openxmlformats.org/presentationml/2006/main">
+  <p:cSld>
+    <p:spTree>
+      <p:nvGrpSpPr>
+        <p:cNvPr id="1" name=""/>
+        <p:cNvGrpSpPr/>
+        <p:nvPr/>
+      </p:nvGrpSpPr>
+      <p:grpSpPr>
+        <a:xfrm>
+          <a:off x="0" y="0"/>
+          <a:ext cx="0" cy="0"/>
+          <a:chOff x="0" y="0"/>
+          <a:chExt cx="0" cy="0"/>
+        </a:xfrm>
+      </p:grpSpPr>
+      <p:sp>
+        <p:nvSpPr>
+          <p:cNvPr id="2" name="Title 1"/>
+          <p:cNvSpPr>
+            <a:spLocks noGrp="1"/>
+          </p:cNvSpPr>
+          <p:nvPr>
+            <p:ph type="title"/>
+          </p:nvPr>
+        </p:nvSpPr>
+        <p:spPr>
+          <a:xfrm>
+            <a:off x="139485" y="78119"/>
+            <a:ext cx="8229600" cy="607682"/>
+          </a:xfrm>
+        </p:spPr>
+        <p:txBody>
+          <a:bodyPr/>
+          <a:lstStyle/>
+          <a:p>
+            <a:pPr lvl="0" indent="0" marL="0">
+              <a:buNone/>
+            </a:pPr>
+            <a:r>
+              <a:rPr/>
+              <a:t>Assumptions of Regression</a:t>
+            </a:r>
+          </a:p>
+        </p:txBody>
+      </p:sp>
+      <p:sp>
+        <p:nvSpPr>
+          <p:cNvPr id="3" name="Text Placeholder 2"/>
+          <p:cNvSpPr>
+            <a:spLocks noGrp="1"/>
+          </p:cNvSpPr>
+          <p:nvPr>
+            <p:ph idx="1" type="body"/>
+          </p:nvPr>
+        </p:nvSpPr>
+        <p:spPr/>
+        <p:txBody>
+          <a:bodyPr/>
+          <a:lstStyle/>
+          <a:p>
+            <a:pPr lvl="0" indent="0" marL="0">
+              <a:buNone/>
+            </a:pPr>
+            <a:r>
+              <a:rPr/>
+              <a:t>Four assumptions must hold for the p-value and confidence intervals to be valid (W&amp;S §17.5):</a:t>
+            </a:r>
+          </a:p>
+        </p:txBody>
+      </p:sp>
+      <p:graphicFrame>
+        <p:nvGraphicFramePr>
+          <p:cNvPr id="6" name="Content Placeholder 5"/>
+          <p:cNvGraphicFramePr>
+            <a:graphicFrameLocks noGrp="1"/>
+          </p:cNvGraphicFramePr>
+          <p:nvPr>
+            <p:ph idx="1"/>
+          </p:nvPr>
+        </p:nvGraphicFramePr>
+        <p:xfrm>
+          <a:off x="127000" y="1270000"/>
+          <a:ext cx="4432300" cy="3302000"/>
+        </p:xfrm>
+        <a:graphic>
+          <a:graphicData uri="http://schemas.openxmlformats.org/drawingml/2006/table">
+            <a:tbl>
+              <a:tblPr firstRow="1" bandRow="1">
+                <a:tableStyleId>{5C22544A-7EE6-4342-B048-85BDC9FD1C3A}</a:tableStyleId>
+              </a:tblPr>
+              <a:tblGrid>
+                <a:gridCol w="1473200"/>
+                <a:gridCol w="1473200"/>
+                <a:gridCol w="1473200"/>
+              </a:tblGrid>
+              <a:tr h="0">
+                <a:tc>
+                  <a:txBody>
+                    <a:bodyPr/>
+                    <a:lstStyle/>
+                    <a:p>
+                      <a:pPr lvl="0" indent="0" marL="0">
+                        <a:buNone/>
+                      </a:pPr>
+                      <a:r>
+                        <a:rPr/>
+                        <a:t>#</a:t>
+                      </a:r>
+                    </a:p>
+                  </a:txBody>
+                  <a:tcPr/>
+                </a:tc>
+                <a:tc>
+                  <a:txBody>
+                    <a:bodyPr/>
+                    <a:lstStyle/>
+                    <a:p>
+                      <a:pPr lvl="0" indent="0" marL="0">
+                        <a:buNone/>
+                      </a:pPr>
+                      <a:r>
+                        <a:rPr/>
+                        <a:t>Assumption</a:t>
+                      </a:r>
+                    </a:p>
+                  </a:txBody>
+                  <a:tcPr/>
+                </a:tc>
+                <a:tc>
+                  <a:txBody>
+                    <a:bodyPr/>
+                    <a:lstStyle/>
+                    <a:p>
+                      <a:pPr lvl="0" indent="0" marL="0">
+                        <a:buNone/>
+                      </a:pPr>
+                      <a:r>
+                        <a:rPr/>
+                        <a:t>How to check</a:t>
+                      </a:r>
+                    </a:p>
+                  </a:txBody>
+                  <a:tcPr/>
+                </a:tc>
+              </a:tr>
+              <a:tr h="0">
+                <a:tc>
+                  <a:txBody>
+                    <a:bodyPr/>
+                    <a:lstStyle/>
+                    <a:p>
+                      <a:pPr lvl="0" indent="0" marL="0">
+                        <a:buNone/>
+                      </a:pPr>
+                      <a:r>
+                        <a:rPr/>
+                        <a:t>1</a:t>
+                      </a:r>
+                    </a:p>
+                  </a:txBody>
+                </a:tc>
+                <a:tc>
+                  <a:txBody>
+                    <a:bodyPr/>
+                    <a:lstStyle/>
+                    <a:p>
+                      <a:pPr lvl="0" indent="0" marL="0">
+                        <a:buNone/>
+                      </a:pPr>
+                      <a:r>
+                        <a:rPr b="1"/>
+                        <a:t>Linearity</a:t>
+                      </a:r>
+                      <a:r>
+                        <a:rPr/>
+                        <a:t> — Y changes linearly with X</a:t>
+                      </a:r>
+                    </a:p>
+                  </a:txBody>
+                </a:tc>
+                <a:tc>
+                  <a:txBody>
+                    <a:bodyPr/>
+                    <a:lstStyle/>
+                    <a:p>
+                      <a:pPr lvl="0" indent="0" marL="0">
+                        <a:buNone/>
+                      </a:pPr>
+                      <a:r>
+                        <a:rPr/>
+                        <a:t>Residual vs. fitted plot</a:t>
+                      </a:r>
+                    </a:p>
+                  </a:txBody>
+                </a:tc>
+              </a:tr>
+              <a:tr h="0">
+                <a:tc>
+                  <a:txBody>
+                    <a:bodyPr/>
+                    <a:lstStyle/>
+                    <a:p>
+                      <a:pPr lvl="0" indent="0" marL="0">
+                        <a:buNone/>
+                      </a:pPr>
+                      <a:r>
+                        <a:rPr/>
+                        <a:t>2</a:t>
+                      </a:r>
+                    </a:p>
+                  </a:txBody>
+                </a:tc>
+                <a:tc>
+                  <a:txBody>
+                    <a:bodyPr/>
+                    <a:lstStyle/>
+                    <a:p>
+                      <a:pPr lvl="0" indent="0" marL="0">
+                        <a:buNone/>
+                      </a:pPr>
+                      <a:r>
+                        <a:rPr b="1"/>
+                        <a:t>Independence</a:t>
+                      </a:r>
+                      <a:r>
+                        <a:rPr/>
+                        <a:t> — observations are independent</a:t>
+                      </a:r>
+                    </a:p>
+                  </a:txBody>
+                </a:tc>
+                <a:tc>
+                  <a:txBody>
+                    <a:bodyPr/>
+                    <a:lstStyle/>
+                    <a:p>
+                      <a:pPr lvl="0" indent="0" marL="0">
+                        <a:buNone/>
+                      </a:pPr>
+                      <a:r>
+                        <a:rPr/>
+                        <a:t>Study design</a:t>
+                      </a:r>
+                    </a:p>
+                  </a:txBody>
+                </a:tc>
+              </a:tr>
+              <a:tr h="0">
+                <a:tc>
+                  <a:txBody>
+                    <a:bodyPr/>
+                    <a:lstStyle/>
+                    <a:p>
+                      <a:pPr lvl="0" indent="0" marL="0">
+                        <a:buNone/>
+                      </a:pPr>
+                      <a:r>
+                        <a:rPr/>
+                        <a:t>3</a:t>
+                      </a:r>
+                    </a:p>
+                  </a:txBody>
+                </a:tc>
+                <a:tc>
+                  <a:txBody>
+                    <a:bodyPr/>
+                    <a:lstStyle/>
+                    <a:p>
+                      <a:pPr lvl="0" indent="0" marL="0">
+                        <a:buNone/>
+                      </a:pPr>
+                      <a:r>
+                        <a:rPr b="1"/>
+                        <a:t>Equal variance</a:t>
+                      </a:r>
+                      <a:r>
+                        <a:rPr/>
+                        <a:t> — spread of residuals is constant</a:t>
+                      </a:r>
+                    </a:p>
+                  </a:txBody>
+                </a:tc>
+                <a:tc>
+                  <a:txBody>
+                    <a:bodyPr/>
+                    <a:lstStyle/>
+                    <a:p>
+                      <a:pPr lvl="0" indent="0" marL="0">
+                        <a:buNone/>
+                      </a:pPr>
+                      <a:r>
+                        <a:rPr/>
+                        <a:t>Residual vs. fitted plot</a:t>
+                      </a:r>
+                    </a:p>
+                  </a:txBody>
+                </a:tc>
+              </a:tr>
+              <a:tr h="0">
+                <a:tc>
+                  <a:txBody>
+                    <a:bodyPr/>
+                    <a:lstStyle/>
+                    <a:p>
+                      <a:pPr lvl="0" indent="0" marL="0">
+                        <a:buNone/>
+                      </a:pPr>
+                      <a:r>
+                        <a:rPr/>
+                        <a:t>4</a:t>
+                      </a:r>
+                    </a:p>
+                  </a:txBody>
+                </a:tc>
+                <a:tc>
+                  <a:txBody>
+                    <a:bodyPr/>
+                    <a:lstStyle/>
+                    <a:p>
+                      <a:pPr lvl="0" indent="0" marL="0">
+                        <a:buNone/>
+                      </a:pPr>
+                      <a:r>
+                        <a:rPr b="1"/>
+                        <a:t>Normality</a:t>
+                      </a:r>
+                      <a:r>
+                        <a:rPr/>
+                        <a:t> — residuals are normally distributed</a:t>
+                      </a:r>
+                    </a:p>
+                  </a:txBody>
+                </a:tc>
+                <a:tc>
+                  <a:txBody>
+                    <a:bodyPr/>
+                    <a:lstStyle/>
+                    <a:p>
+                      <a:pPr lvl="0" indent="0" marL="0">
+                        <a:buNone/>
+                      </a:pPr>
+                      <a:r>
+                        <a:rPr/>
+                        <a:t>QQ plot + Shapiro-Wilk</a:t>
+                      </a:r>
+                    </a:p>
+                  </a:txBody>
+                </a:tc>
+              </a:tr>
+            </a:tbl>
+          </a:graphicData>
+        </a:graphic>
+      </p:graphicFrame>
+      <p:sp>
+        <p:nvSpPr>
+          <p:cNvPr id="5" name="Text Placeholder 4"/>
+          <p:cNvSpPr>
+            <a:spLocks noGrp="1"/>
+          </p:cNvSpPr>
+          <p:nvPr>
+            <p:ph idx="3" sz="quarter" type="body"/>
+          </p:nvPr>
+        </p:nvSpPr>
+        <p:spPr/>
+        <p:txBody>
+          <a:bodyPr/>
+          <a:lstStyle/>
+          <a:p>
+            <a:pPr lvl="0" indent="0" marL="1270000">
+              <a:buNone/>
+            </a:pPr>
+            <a:r>
+              <a:rPr sz="2000" b="1"/>
+              <a:t>Important</a:t>
+            </a:r>
+          </a:p>
+          <a:p>
+            <a:pPr lvl="0" indent="0" marL="1270000">
+              <a:buNone/>
+            </a:pPr>
+            <a:r>
+              <a:rPr sz="2000" b="1"/>
+              <a:t>Check residuals, not raw data.</a:t>
+            </a:r>
+          </a:p>
+          <a:p>
+            <a:pPr lvl="0" indent="0" marL="1270000">
+              <a:buNone/>
+            </a:pPr>
+            <a:r>
+              <a:rPr sz="2000"/>
+              <a:t>The normality assumption is about the </a:t>
+            </a:r>
+            <a:r>
+              <a:rPr sz="2000" b="1"/>
+              <a:t>residuals</a:t>
+            </a:r>
+            <a:r>
+              <a:rPr sz="2000"/>
+              <a:t> (observed − predicted), not the original Y values.</a:t>
+            </a:r>
+          </a:p>
+          <a:p>
+            <a:pPr lvl="0" indent="0" marL="1270000">
+              <a:buNone/>
+            </a:pPr>
+            <a:r>
+              <a:rPr sz="2000"/>
+              <a:t>A well-fitted residual plot looks like a random horizontal cloud of points centered at zero — no curves, no funnel shapes.</a:t>
+            </a:r>
+          </a:p>
+          <a:p>
+            <a:pPr lvl="0" indent="0" marL="0">
+              <a:buNone/>
+            </a:pPr>
+            <a:r>
+              <a:rPr/>
+              <a:t>📖 W&amp;S §17.5 pp. 557–560 (Figures 17.5-1, 17.5-4)</a:t>
+            </a:r>
+          </a:p>
+        </p:txBody>
+      </p:sp>
+    </p:spTree>
+  </p:cSld>
+</p:sld>
+</file>
+
+<file path=ppt/slides/slide13.xml><?xml version="1.0" encoding="utf-8"?>
+<p:sld xmlns:a="http://schemas.openxmlformats.org/drawingml/2006/main" xmlns:r="http://schemas.openxmlformats.org/officeDocument/2006/relationships" xmlns:p="http://schemas.openxmlformats.org/presentationml/2006/main">
+  <p:cSld>
+    <p:spTree>
+      <p:nvGrpSpPr>
+        <p:cNvPr id="1" name=""/>
+        <p:cNvGrpSpPr/>
+        <p:nvPr/>
+      </p:nvGrpSpPr>
+      <p:grpSpPr>
+        <a:xfrm>
+          <a:off x="0" y="0"/>
+          <a:ext cx="0" cy="0"/>
+          <a:chOff x="0" y="0"/>
+          <a:chExt cx="0" cy="0"/>
+        </a:xfrm>
+      </p:grpSpPr>
+      <p:sp>
+        <p:nvSpPr>
+          <p:cNvPr id="2" name="Title 1"/>
+          <p:cNvSpPr>
+            <a:spLocks noGrp="1"/>
+          </p:cNvSpPr>
+          <p:nvPr>
+            <p:ph type="title"/>
+          </p:nvPr>
+        </p:nvSpPr>
+        <p:spPr>
+          <a:xfrm>
+            <a:off x="0" y="0"/>
+            <a:ext cx="9144000" cy="582780"/>
+          </a:xfrm>
+        </p:spPr>
+        <p:txBody>
+          <a:bodyPr/>
+          <a:lstStyle/>
+          <a:p>
+            <a:pPr lvl="0" indent="0" marL="0">
+              <a:buNone/>
+            </a:pPr>
+            <a:r>
+              <a:rPr/>
+              <a:t>🛑 Pause — Do Activity Parts 1–3 Now</a:t>
+            </a:r>
+          </a:p>
+        </p:txBody>
+      </p:sp>
+      <p:sp>
+        <p:nvSpPr>
+          <p:cNvPr id="3" name="Content Placeholder 2"/>
+          <p:cNvSpPr>
+            <a:spLocks noGrp="1"/>
+          </p:cNvSpPr>
+          <p:nvPr>
+            <p:ph idx="1"/>
+          </p:nvPr>
+        </p:nvSpPr>
+        <p:spPr/>
+        <p:txBody>
+          <a:bodyPr/>
+          <a:lstStyle/>
+          <a:p>
+            <a:pPr lvl="0" indent="0" marL="0">
+              <a:buNone/>
+            </a:pPr>
+            <a:r>
+              <a:rPr/>
+              <a:t>Load </a:t>
+            </a:r>
+            <a:r>
+              <a:rPr>
+                <a:latin typeface="Courier"/>
+              </a:rPr>
+              <a:t>paper_area_weights.xlsx</a:t>
+            </a:r>
+            <a:r>
+              <a:rPr/>
+              <a:t>, inspect it with </a:t>
+            </a:r>
+            <a:r>
+              <a:rPr>
+                <a:latin typeface="Courier"/>
+              </a:rPr>
+              <a:t>skim()</a:t>
+            </a:r>
+            <a:r>
+              <a:rPr/>
+              <a:t>, and make the scatter of area vs mass. Predict the shape before you plot it.</a:t>
+            </a:r>
+          </a:p>
+        </p:txBody>
+      </p:sp>
+    </p:spTree>
+  </p:cSld>
+</p:sld>
+</file>
+
+<file path=ppt/slides/slide14.xml><?xml version="1.0" encoding="utf-8"?>
+<p:sld xmlns:a="http://schemas.openxmlformats.org/drawingml/2006/main" xmlns:r="http://schemas.openxmlformats.org/officeDocument/2006/relationships" xmlns:p="http://schemas.openxmlformats.org/presentationml/2006/main">
+  <p:cSld>
+    <p:spTree>
+      <p:nvGrpSpPr>
+        <p:cNvPr id="1" name=""/>
+        <p:cNvGrpSpPr/>
+        <p:nvPr/>
+      </p:nvGrpSpPr>
+      <p:grpSpPr>
+        <a:xfrm>
+          <a:off x="0" y="0"/>
+          <a:ext cx="0" cy="0"/>
+          <a:chOff x="0" y="0"/>
+          <a:chExt cx="0" cy="0"/>
+        </a:xfrm>
+      </p:grpSpPr>
+      <p:sp>
+        <p:nvSpPr>
+          <p:cNvPr id="2" name="Title 1"/>
+          <p:cNvSpPr>
+            <a:spLocks noGrp="1"/>
+          </p:cNvSpPr>
+          <p:nvPr>
+            <p:ph type="title"/>
+          </p:nvPr>
+        </p:nvSpPr>
+        <p:spPr>
+          <a:xfrm>
+            <a:off x="0" y="0"/>
+            <a:ext cx="9144000" cy="582780"/>
+          </a:xfrm>
+        </p:spPr>
+        <p:txBody>
+          <a:bodyPr/>
+          <a:lstStyle/>
+          <a:p>
+            <a:pPr lvl="0" indent="0" marL="0">
+              <a:buNone/>
+            </a:pPr>
+            <a:r>
+              <a:rPr/>
+              <a:t>🧩 Chunk 2 of 4 · Fit the Model &amp; Read It</a:t>
+            </a:r>
+          </a:p>
+        </p:txBody>
+      </p:sp>
+      <p:sp>
+        <p:nvSpPr>
+          <p:cNvPr id="3" name="Content Placeholder 2"/>
+          <p:cNvSpPr>
+            <a:spLocks noGrp="1"/>
+          </p:cNvSpPr>
+          <p:nvPr>
+            <p:ph idx="1"/>
+          </p:nvPr>
+        </p:nvSpPr>
+        <p:spPr/>
+        <p:txBody>
+          <a:bodyPr/>
+          <a:lstStyle/>
+          <a:p>
+            <a:pPr lvl="0" indent="0" marL="0">
+              <a:buNone/>
+            </a:pPr>
+            <a:r>
+              <a:rPr b="1"/>
+              <a:t>We will cover:</a:t>
+            </a:r>
+            <a:r>
+              <a:rPr/>
+              <a:t> loading the data, </a:t>
+            </a:r>
+            <a:r>
+              <a:rPr>
+                <a:latin typeface="Courier"/>
+              </a:rPr>
+              <a:t>lm()</a:t>
+            </a:r>
+            <a:r>
+              <a:rPr/>
+              <a:t>, and reading every line of </a:t>
+            </a:r>
+            <a:r>
+              <a:rPr>
+                <a:latin typeface="Courier"/>
+              </a:rPr>
+              <a:t>summary()</a:t>
+            </a:r>
+            <a:r>
+              <a:rPr/>
+              <a:t> — slope, intercept, and R².</a:t>
+            </a:r>
+          </a:p>
+          <a:p>
+            <a:pPr lvl="0" indent="0" marL="1270000">
+              <a:buNone/>
+            </a:pPr>
+            <a:r>
+              <a:rPr sz="2000" b="1"/>
+              <a:t>Tip</a:t>
+            </a:r>
+          </a:p>
+          <a:p>
+            <a:pPr lvl="0" indent="0" marL="1270000">
+              <a:buNone/>
+            </a:pPr>
+            <a:r>
+              <a:rPr sz="2000" b="1"/>
+              <a:t>🖐 After this chunk: Activity Parts 4–7</a:t>
+            </a:r>
+            <a:r>
+              <a:rPr sz="2000"/>
+              <a:t> (fit </a:t>
+            </a:r>
+            <a:r>
+              <a:rPr sz="2000">
+                <a:latin typeface="Courier"/>
+              </a:rPr>
+              <a:t>lm()</a:t>
+            </a:r>
+            <a:r>
+              <a:rPr sz="2000"/>
+              <a:t>, decode </a:t>
+            </a:r>
+            <a:r>
+              <a:rPr sz="2000">
+                <a:latin typeface="Courier"/>
+              </a:rPr>
+              <a:t>summary()</a:t>
+            </a:r>
+            <a:r>
+              <a:rPr sz="2000"/>
+              <a:t>, pull the equation and R²).</a:t>
+            </a:r>
+          </a:p>
+        </p:txBody>
+      </p:sp>
+    </p:spTree>
+  </p:cSld>
+</p:sld>
+</file>
+
+<file path=ppt/slides/slide15.xml><?xml version="1.0" encoding="utf-8"?>
+<p:sld xmlns:a="http://schemas.openxmlformats.org/drawingml/2006/main" xmlns:r="http://schemas.openxmlformats.org/officeDocument/2006/relationships" xmlns:p="http://schemas.openxmlformats.org/presentationml/2006/main">
+  <p:cSld>
+    <p:spTree>
+      <p:nvGrpSpPr>
+        <p:cNvPr id="1" name=""/>
+        <p:cNvGrpSpPr/>
+        <p:nvPr/>
+      </p:nvGrpSpPr>
+      <p:grpSpPr>
+        <a:xfrm>
+          <a:off x="0" y="0"/>
+          <a:ext cx="0" cy="0"/>
+          <a:chOff x="0" y="0"/>
+          <a:chExt cx="0" cy="0"/>
+        </a:xfrm>
+      </p:grpSpPr>
+      <p:sp>
+        <p:nvSpPr>
+          <p:cNvPr id="2" name="Title 1"/>
+          <p:cNvSpPr>
+            <a:spLocks noGrp="1"/>
+          </p:cNvSpPr>
+          <p:nvPr>
+            <p:ph type="title"/>
+          </p:nvPr>
+        </p:nvSpPr>
+        <p:spPr>
+          <a:xfrm>
+            <a:off x="0" y="0"/>
+            <a:ext cx="9144000" cy="582780"/>
+          </a:xfrm>
+        </p:spPr>
+        <p:txBody>
+          <a:bodyPr/>
+          <a:lstStyle/>
+          <a:p>
+            <a:pPr lvl="0" indent="0" marL="0">
+              <a:buNone/>
+            </a:pPr>
+            <a:r>
+              <a:rPr/>
+              <a:t>Load Libraries and Data</a:t>
+            </a:r>
+          </a:p>
+        </p:txBody>
+      </p:sp>
+      <p:sp>
+        <p:nvSpPr>
+          <p:cNvPr id="3" name="Content Placeholder 2"/>
+          <p:cNvSpPr>
+            <a:spLocks noGrp="1"/>
+          </p:cNvSpPr>
+          <p:nvPr>
+            <p:ph idx="1"/>
+          </p:nvPr>
+        </p:nvSpPr>
+        <p:spPr/>
+        <p:txBody>
+          <a:bodyPr/>
+          <a:lstStyle/>
+          <a:p>
+            <a:pPr lvl="0" indent="0">
+              <a:buNone/>
+            </a:pPr>
+            <a:r>
+              <a:rPr>
+                <a:solidFill>
+                  <a:srgbClr val="5E5E5E"/>
+                </a:solidFill>
+                <a:latin typeface="Courier"/>
+              </a:rPr>
+              <a:t># Load packages at the top of the script ---------------</a:t>
+            </a:r>
+            <a:br/>
+            <a:r>
+              <a:rPr>
+                <a:solidFill>
+                  <a:srgbClr val="4758AB"/>
+                </a:solidFill>
+                <a:latin typeface="Courier"/>
+              </a:rPr>
+              <a:t>library</a:t>
+            </a:r>
+            <a:r>
+              <a:rPr>
+                <a:solidFill>
+                  <a:srgbClr val="003B4F"/>
+                </a:solidFill>
+                <a:latin typeface="Courier"/>
+              </a:rPr>
+              <a:t>(readxl) </a:t>
+            </a:r>
+            <a:r>
+              <a:rPr>
+                <a:solidFill>
+                  <a:srgbClr val="5E5E5E"/>
+                </a:solidFill>
+                <a:latin typeface="Courier"/>
+              </a:rPr>
+              <a:t># reading Excel files</a:t>
+            </a:r>
+            <a:br/>
+            <a:r>
+              <a:rPr>
+                <a:solidFill>
+                  <a:srgbClr val="4758AB"/>
+                </a:solidFill>
+                <a:latin typeface="Courier"/>
+              </a:rPr>
+              <a:t>library</a:t>
+            </a:r>
+            <a:r>
+              <a:rPr>
+                <a:solidFill>
+                  <a:srgbClr val="003B4F"/>
+                </a:solidFill>
+                <a:latin typeface="Courier"/>
+              </a:rPr>
+              <a:t>(tidyverse) </a:t>
+            </a:r>
+            <a:r>
+              <a:rPr>
+                <a:solidFill>
+                  <a:srgbClr val="5E5E5E"/>
+                </a:solidFill>
+                <a:latin typeface="Courier"/>
+              </a:rPr>
+              <a:t># data manipulation + ggplot2</a:t>
+            </a:r>
+            <a:br/>
+            <a:r>
+              <a:rPr>
+                <a:solidFill>
+                  <a:srgbClr val="4758AB"/>
+                </a:solidFill>
+                <a:latin typeface="Courier"/>
+              </a:rPr>
+              <a:t>library</a:t>
+            </a:r>
+            <a:r>
+              <a:rPr>
+                <a:solidFill>
+                  <a:srgbClr val="003B4F"/>
+                </a:solidFill>
+                <a:latin typeface="Courier"/>
+              </a:rPr>
+              <a:t>(skimr) </a:t>
+            </a:r>
+            <a:r>
+              <a:rPr>
+                <a:solidFill>
+                  <a:srgbClr val="5E5E5E"/>
+                </a:solidFill>
+                <a:latin typeface="Courier"/>
+              </a:rPr>
+              <a:t># fast data overview</a:t>
+            </a:r>
+          </a:p>
+          <a:p>
+            <a:pPr lvl="0" indent="0">
+              <a:buNone/>
+            </a:pPr>
+            <a:r>
+              <a:rPr>
+                <a:solidFill>
+                  <a:srgbClr val="5E5E5E"/>
+                </a:solidFill>
+                <a:latin typeface="Courier"/>
+              </a:rPr>
+              <a:t># Load the paper calibration data ----------------------</a:t>
+            </a:r>
+            <a:br/>
+            <a:r>
+              <a:rPr>
+                <a:solidFill>
+                  <a:srgbClr val="003B4F"/>
+                </a:solidFill>
+                <a:latin typeface="Courier"/>
+              </a:rPr>
+              <a:t>paper_df &lt;- </a:t>
+            </a:r>
+            <a:r>
+              <a:rPr>
+                <a:solidFill>
+                  <a:srgbClr val="4758AB"/>
+                </a:solidFill>
+                <a:latin typeface="Courier"/>
+              </a:rPr>
+              <a:t>read_excel</a:t>
+            </a:r>
+            <a:r>
+              <a:rPr>
+                <a:solidFill>
+                  <a:srgbClr val="003B4F"/>
+                </a:solidFill>
+                <a:latin typeface="Courier"/>
+              </a:rPr>
+              <a:t>(</a:t>
+            </a:r>
+            <a:r>
+              <a:rPr>
+                <a:solidFill>
+                  <a:srgbClr val="20794D"/>
+                </a:solidFill>
+                <a:latin typeface="Courier"/>
+              </a:rPr>
+              <a:t>"data/paper_area_weights.xlsx"</a:t>
+            </a:r>
+            <a:r>
+              <a:rPr>
+                <a:solidFill>
+                  <a:srgbClr val="003B4F"/>
+                </a:solidFill>
+                <a:latin typeface="Courier"/>
+              </a:rPr>
+              <a:t>)</a:t>
+            </a:r>
+          </a:p>
+          <a:p>
+            <a:pPr lvl="0" indent="0" marL="1270000">
+              <a:buNone/>
+            </a:pPr>
+            <a:r>
+              <a:rPr sz="2000" b="1"/>
+              <a:t>Note</a:t>
+            </a:r>
+          </a:p>
+          <a:p>
+            <a:pPr lvl="0" indent="0" marL="1270000">
+              <a:buNone/>
+            </a:pPr>
+            <a:r>
+              <a:rPr sz="2000"/>
+              <a:t>The file </a:t>
+            </a:r>
+            <a:r>
+              <a:rPr sz="2000">
+                <a:latin typeface="Courier"/>
+              </a:rPr>
+              <a:t>paper_area_weights.xlsx</a:t>
+            </a:r>
+            <a:r>
+              <a:rPr sz="2000"/>
+              <a:t> contains 118 paper squares of </a:t>
+            </a:r>
+            <a:r>
+              <a:rPr sz="2000" b="1"/>
+              <a:t>known area</a:t>
+            </a:r>
+            <a:r>
+              <a:rPr sz="2000"/>
+              <a:t> (1–567 cm²) with their measured masses. This is the calibration dataset we use to predict leaf area from a tracing weight.</a:t>
+            </a:r>
+          </a:p>
+        </p:txBody>
+      </p:sp>
+    </p:spTree>
+  </p:cSld>
+</p:sld>
+</file>
+
+<file path=ppt/slides/slide16.xml><?xml version="1.0" encoding="utf-8"?>
 <p:sld xmlns:a="http://schemas.openxmlformats.org/drawingml/2006/main" xmlns:r="http://schemas.openxmlformats.org/officeDocument/2006/relationships" xmlns:p="http://schemas.openxmlformats.org/presentationml/2006/main">
   <p:cSld>
     <p:spTree>
@@ -4881,7 +6151,7 @@
 </p:sld>
 </file>
 
-<file path=ppt/slides/slide12.xml><?xml version="1.0" encoding="utf-8"?>
+<file path=ppt/slides/slide17.xml><?xml version="1.0" encoding="utf-8"?>
 <p:sld xmlns:a="http://schemas.openxmlformats.org/drawingml/2006/main" xmlns:r="http://schemas.openxmlformats.org/officeDocument/2006/relationships" xmlns:p="http://schemas.openxmlformats.org/presentationml/2006/main">
   <p:cSld>
     <p:spTree>
@@ -5514,7 +6784,7 @@
 </p:sld>
 </file>
 
-<file path=ppt/slides/slide13.xml><?xml version="1.0" encoding="utf-8"?>
+<file path=ppt/slides/slide18.xml><?xml version="1.0" encoding="utf-8"?>
 <p:sld xmlns:a="http://schemas.openxmlformats.org/drawingml/2006/main" xmlns:r="http://schemas.openxmlformats.org/officeDocument/2006/relationships" xmlns:p="http://schemas.openxmlformats.org/presentationml/2006/main">
   <p:cSld>
     <p:spTree>
@@ -5544,11 +6814,8 @@
         <p:spPr>
           <a:xfrm>
             <a:off x="0" y="0"/>
-            <a:ext cx="9144000" cy="602780"/>
+            <a:ext cx="9144000" cy="582780"/>
           </a:xfrm>
-          <a:solidFill>
-            <a:srgbClr val="1A1A2E"/>
-          </a:solidFill>
         </p:spPr>
         <p:txBody>
           <a:bodyPr/>
@@ -5570,6 +6837,74 @@
           </a:p>
         </p:txBody>
       </p:sp>
+      <p:sp>
+        <p:nvSpPr>
+          <p:cNvPr id="3" name="Content Placeholder 2"/>
+          <p:cNvSpPr>
+            <a:spLocks noGrp="1"/>
+          </p:cNvSpPr>
+          <p:nvPr>
+            <p:ph idx="1"/>
+          </p:nvPr>
+        </p:nvSpPr>
+        <p:spPr/>
+        <p:txBody>
+          <a:bodyPr/>
+          <a:lstStyle/>
+          <a:p>
+            <a:pPr lvl="0" indent="0" marL="1270000">
+              <a:buNone/>
+            </a:pPr>
+            <a:r>
+              <a:rPr sz="2000" b="1"/>
+              <a:t>Note</a:t>
+            </a:r>
+          </a:p>
+          <a:p>
+            <a:pPr lvl="0" indent="0" marL="1270000">
+              <a:buNone/>
+            </a:pPr>
+            <a:r>
+              <a:rPr sz="2000" b="1"/>
+              <a:t>🔮 Predict first:</a:t>
+            </a:r>
+            <a:r>
+              <a:rPr sz="2000"/>
+              <a:t> area rises with mass. Before you read the output — will the slope be </a:t>
+            </a:r>
+            <a:r>
+              <a:rPr sz="2000" b="1"/>
+              <a:t>positive or negative</a:t>
+            </a:r>
+            <a:r>
+              <a:rPr sz="2000"/>
+              <a:t>? Roughly how many cm² per gram of paper?</a:t>
+            </a:r>
+          </a:p>
+        </p:txBody>
+      </p:sp>
+    </p:spTree>
+  </p:cSld>
+</p:sld>
+</file>
+
+<file path=ppt/slides/slide19.xml><?xml version="1.0" encoding="utf-8"?>
+<p:sld xmlns:a="http://schemas.openxmlformats.org/drawingml/2006/main" xmlns:r="http://schemas.openxmlformats.org/officeDocument/2006/relationships" xmlns:p="http://schemas.openxmlformats.org/presentationml/2006/main">
+  <p:cSld>
+    <p:spTree>
+      <p:nvGrpSpPr>
+        <p:cNvPr id="1" name=""/>
+        <p:cNvGrpSpPr/>
+        <p:nvPr/>
+      </p:nvGrpSpPr>
+      <p:grpSpPr>
+        <a:xfrm>
+          <a:off x="0" y="0"/>
+          <a:ext cx="0" cy="0"/>
+          <a:chOff x="0" y="0"/>
+          <a:chExt cx="0" cy="0"/>
+        </a:xfrm>
+      </p:grpSpPr>
       <p:sp>
         <p:nvSpPr>
           <p:cNvPr id="3" name="Content Placeholder 2"/>
@@ -5877,7 +7212,300 @@
 </p:sld>
 </file>
 
-<file path=ppt/slides/slide14.xml><?xml version="1.0" encoding="utf-8"?>
+<file path=ppt/slides/slide2.xml><?xml version="1.0" encoding="utf-8"?>
+<p:sld xmlns:a="http://schemas.openxmlformats.org/drawingml/2006/main" xmlns:r="http://schemas.openxmlformats.org/officeDocument/2006/relationships" xmlns:p="http://schemas.openxmlformats.org/presentationml/2006/main">
+  <p:cSld>
+    <p:spTree>
+      <p:nvGrpSpPr>
+        <p:cNvPr id="1" name=""/>
+        <p:cNvGrpSpPr/>
+        <p:nvPr/>
+      </p:nvGrpSpPr>
+      <p:grpSpPr>
+        <a:xfrm>
+          <a:off x="0" y="0"/>
+          <a:ext cx="0" cy="0"/>
+          <a:chOff x="0" y="0"/>
+          <a:chExt cx="0" cy="0"/>
+        </a:xfrm>
+      </p:grpSpPr>
+      <p:sp>
+        <p:nvSpPr>
+          <p:cNvPr id="2" name="Title 1"/>
+          <p:cNvSpPr>
+            <a:spLocks noGrp="1"/>
+          </p:cNvSpPr>
+          <p:nvPr>
+            <p:ph type="title"/>
+          </p:nvPr>
+        </p:nvSpPr>
+        <p:spPr>
+          <a:xfrm>
+            <a:off x="0" y="0"/>
+            <a:ext cx="9144000" cy="582780"/>
+          </a:xfrm>
+        </p:spPr>
+        <p:txBody>
+          <a:bodyPr/>
+          <a:lstStyle/>
+          <a:p>
+            <a:pPr lvl="0" indent="0" marL="0">
+              <a:buNone/>
+            </a:pPr>
+            <a:r>
+              <a:rPr/>
+              <a:t>Where we left off (Lecture 4.5)</a:t>
+            </a:r>
+          </a:p>
+        </p:txBody>
+      </p:sp>
+      <p:sp>
+        <p:nvSpPr>
+          <p:cNvPr id="3" name="Content Placeholder 2"/>
+          <p:cNvSpPr>
+            <a:spLocks noGrp="1"/>
+          </p:cNvSpPr>
+          <p:nvPr>
+            <p:ph idx="1"/>
+          </p:nvPr>
+        </p:nvSpPr>
+        <p:spPr/>
+        <p:txBody>
+          <a:bodyPr/>
+          <a:lstStyle/>
+          <a:p>
+            <a:pPr lvl="0"/>
+            <a:r>
+              <a:rPr b="1"/>
+              <a:t>Quarto</a:t>
+            </a:r>
+            <a:r>
+              <a:rPr/>
+              <a:t> — one </a:t>
+            </a:r>
+            <a:r>
+              <a:rPr>
+                <a:latin typeface="Courier"/>
+              </a:rPr>
+              <a:t>.qmd</a:t>
+            </a:r>
+            <a:r>
+              <a:rPr/>
+              <a:t> file holds your </a:t>
+            </a:r>
+            <a:r>
+              <a:rPr b="1"/>
+              <a:t>writing </a:t>
+            </a:r>
+            <a:r>
+              <a:rPr b="1" i="1"/>
+              <a:t>and</a:t>
+            </a:r>
+            <a:r>
+              <a:rPr b="1"/>
+              <a:t> your code</a:t>
+            </a:r>
+            <a:r>
+              <a:rPr/>
+              <a:t>, and renders to Word, HTML, or PowerPoint</a:t>
+            </a:r>
+          </a:p>
+          <a:p>
+            <a:pPr lvl="0"/>
+            <a:r>
+              <a:rPr b="1"/>
+              <a:t>Three ingredients</a:t>
+            </a:r>
+            <a:r>
+              <a:rPr/>
+              <a:t> — YAML front matter, Markdown text, and named code chunks</a:t>
+            </a:r>
+          </a:p>
+          <a:p>
+            <a:pPr lvl="0"/>
+            <a:r>
+              <a:rPr b="1"/>
+              <a:t>Reproducibility</a:t>
+            </a:r>
+            <a:r>
+              <a:rPr/>
+              <a:t> — numbers and figures are </a:t>
+            </a:r>
+            <a:r>
+              <a:rPr i="1"/>
+              <a:t>computed</a:t>
+            </a:r>
+            <a:r>
+              <a:rPr/>
+              <a:t>, never copied by hand; change the data, press </a:t>
+            </a:r>
+            <a:r>
+              <a:rPr b="1"/>
+              <a:t>Render</a:t>
+            </a:r>
+          </a:p>
+          <a:p>
+            <a:pPr lvl="0"/>
+            <a:r>
+              <a:rPr b="1"/>
+              <a:t>Inline code</a:t>
+            </a:r>
+            <a:r>
+              <a:rPr/>
+              <a:t> — drop a live result straight into a sentence with </a:t>
+            </a:r>
+            <a:r>
+              <a:rPr>
+                <a:latin typeface="Courier"/>
+              </a:rPr>
+              <a:t>`r `</a:t>
+            </a:r>
+          </a:p>
+          <a:p>
+            <a:pPr lvl="0"/>
+            <a:r>
+              <a:rPr b="1"/>
+              <a:t>Word reports</a:t>
+            </a:r>
+            <a:r>
+              <a:rPr/>
+              <a:t> — </a:t>
+            </a:r>
+            <a:r>
+              <a:rPr>
+                <a:latin typeface="Courier"/>
+              </a:rPr>
+              <a:t>format: docx</a:t>
+            </a:r>
+            <a:r>
+              <a:rPr/>
+              <a:t> with </a:t>
+            </a:r>
+            <a:r>
+              <a:rPr>
+                <a:latin typeface="Courier"/>
+              </a:rPr>
+              <a:t>toc</a:t>
+            </a:r>
+            <a:r>
+              <a:rPr/>
+              <a:t> and </a:t>
+            </a:r>
+            <a:r>
+              <a:rPr>
+                <a:latin typeface="Courier"/>
+              </a:rPr>
+              <a:t>number-sections</a:t>
+            </a:r>
+            <a:r>
+              <a:rPr/>
+              <a:t> gives a professional document</a:t>
+            </a:r>
+          </a:p>
+          <a:p>
+            <a:pPr lvl="0"/>
+            <a:r>
+              <a:rPr b="1"/>
+              <a:t>Carried forward (Lecture 04)</a:t>
+            </a:r>
+            <a:r>
+              <a:rPr/>
+              <a:t> — shady leaves were significantly </a:t>
+            </a:r>
+            <a:r>
+              <a:rPr i="1"/>
+              <a:t>heavier</a:t>
+            </a:r>
+            <a:r>
+              <a:rPr/>
+              <a:t> than sunny leaves (Welch’s t-test, </a:t>
+            </a:r>
+            <a:r>
+              <a:rPr i="1"/>
+              <a:t>p</a:t>
+            </a:r>
+            <a:r>
+              <a:rPr/>
+              <a:t> &lt; 0.001)</a:t>
+            </a:r>
+          </a:p>
+          <a:p>
+            <a:pPr lvl="0" indent="0" marL="1270000">
+              <a:buNone/>
+            </a:pPr>
+            <a:r>
+              <a:rPr sz="2000" b="1"/>
+              <a:t>Note</a:t>
+            </a:r>
+          </a:p>
+          <a:p>
+            <a:pPr lvl="0" indent="0" marL="1270000">
+              <a:buNone/>
+            </a:pPr>
+            <a:r>
+              <a:rPr sz="2000" b="1"/>
+              <a:t>✅ Transition</a:t>
+            </a:r>
+          </a:p>
+          <a:p>
+            <a:pPr lvl="0" indent="0" marL="1270000">
+              <a:buNone/>
+            </a:pPr>
+            <a:r>
+              <a:rPr sz="2000"/>
+              <a:t>You can now build a reproducible report. Today’s analysis — a </a:t>
+            </a:r>
+            <a:r>
+              <a:rPr sz="2000" b="1"/>
+              <a:t>calibration curve</a:t>
+            </a:r>
+            <a:r>
+              <a:rPr sz="2000"/>
+              <a:t> that converts leaf weight into a more meaningful measurement, </a:t>
+            </a:r>
+            <a:r>
+              <a:rPr sz="2000" b="1"/>
+              <a:t>leaf surface area</a:t>
+            </a:r>
+            <a:r>
+              <a:rPr sz="2000"/>
+              <a:t> (cm²) — is the perfect thing to write up in one. The activity gives you this same analysis as </a:t>
+            </a:r>
+            <a:r>
+              <a:rPr sz="2000" i="1"/>
+              <a:t>both</a:t>
+            </a:r>
+            <a:r>
+              <a:rPr sz="2000"/>
+              <a:t> a plain </a:t>
+            </a:r>
+            <a:r>
+              <a:rPr sz="2000">
+                <a:latin typeface="Courier"/>
+              </a:rPr>
+              <a:t>.R</a:t>
+            </a:r>
+            <a:r>
+              <a:rPr sz="2000"/>
+              <a:t> script </a:t>
+            </a:r>
+            <a:r>
+              <a:rPr sz="2000" b="1"/>
+              <a:t>and</a:t>
+            </a:r>
+            <a:r>
+              <a:rPr sz="2000"/>
+              <a:t> a Quarto report, so you can feel the difference.</a:t>
+            </a:r>
+          </a:p>
+        </p:txBody>
+      </p:sp>
+    </p:spTree>
+  </p:cSld>
+</p:sld>
+</file>
+
+<file path=ppt/slides/slide20.xml><?xml version="1.0" encoding="utf-8"?>
 <p:sld xmlns:a="http://schemas.openxmlformats.org/drawingml/2006/main" xmlns:r="http://schemas.openxmlformats.org/officeDocument/2006/relationships" xmlns:p="http://schemas.openxmlformats.org/presentationml/2006/main">
   <p:cSld>
     <p:spTree>
@@ -6648,7 +8276,7 @@
 </p:sld>
 </file>
 
-<file path=ppt/slides/slide15.xml><?xml version="1.0" encoding="utf-8"?>
+<file path=ppt/slides/slide21.xml><?xml version="1.0" encoding="utf-8"?>
 <p:sld xmlns:a="http://schemas.openxmlformats.org/drawingml/2006/main" xmlns:r="http://schemas.openxmlformats.org/officeDocument/2006/relationships" xmlns:p="http://schemas.openxmlformats.org/presentationml/2006/main">
   <p:cSld>
     <p:spTree>
@@ -7444,7 +9072,207 @@
 </p:sld>
 </file>
 
-<file path=ppt/slides/slide16.xml><?xml version="1.0" encoding="utf-8"?>
+<file path=ppt/slides/slide22.xml><?xml version="1.0" encoding="utf-8"?>
+<p:sld xmlns:a="http://schemas.openxmlformats.org/drawingml/2006/main" xmlns:r="http://schemas.openxmlformats.org/officeDocument/2006/relationships" xmlns:p="http://schemas.openxmlformats.org/presentationml/2006/main">
+  <p:cSld>
+    <p:spTree>
+      <p:nvGrpSpPr>
+        <p:cNvPr id="1" name=""/>
+        <p:cNvGrpSpPr/>
+        <p:nvPr/>
+      </p:nvGrpSpPr>
+      <p:grpSpPr>
+        <a:xfrm>
+          <a:off x="0" y="0"/>
+          <a:ext cx="0" cy="0"/>
+          <a:chOff x="0" y="0"/>
+          <a:chExt cx="0" cy="0"/>
+        </a:xfrm>
+      </p:grpSpPr>
+      <p:sp>
+        <p:nvSpPr>
+          <p:cNvPr id="2" name="Title 1"/>
+          <p:cNvSpPr>
+            <a:spLocks noGrp="1"/>
+          </p:cNvSpPr>
+          <p:nvPr>
+            <p:ph type="title"/>
+          </p:nvPr>
+        </p:nvSpPr>
+        <p:spPr>
+          <a:xfrm>
+            <a:off x="0" y="0"/>
+            <a:ext cx="9144000" cy="582780"/>
+          </a:xfrm>
+        </p:spPr>
+        <p:txBody>
+          <a:bodyPr/>
+          <a:lstStyle/>
+          <a:p>
+            <a:pPr lvl="0" indent="0" marL="0">
+              <a:buNone/>
+            </a:pPr>
+            <a:r>
+              <a:rPr/>
+              <a:t>🛑 Pause — Do Activity Parts 4–7 Now</a:t>
+            </a:r>
+          </a:p>
+        </p:txBody>
+      </p:sp>
+      <p:sp>
+        <p:nvSpPr>
+          <p:cNvPr id="3" name="Content Placeholder 2"/>
+          <p:cNvSpPr>
+            <a:spLocks noGrp="1"/>
+          </p:cNvSpPr>
+          <p:nvPr>
+            <p:ph idx="1"/>
+          </p:nvPr>
+        </p:nvSpPr>
+        <p:spPr/>
+        <p:txBody>
+          <a:bodyPr/>
+          <a:lstStyle/>
+          <a:p>
+            <a:pPr lvl="0" indent="0" marL="0">
+              <a:buNone/>
+            </a:pPr>
+            <a:r>
+              <a:rPr/>
+              <a:t>Fit </a:t>
+            </a:r>
+            <a:r>
+              <a:rPr>
+                <a:latin typeface="Courier"/>
+              </a:rPr>
+              <a:t>lm(area_cm2 ~ mass_g)</a:t>
+            </a:r>
+            <a:r>
+              <a:rPr/>
+              <a:t>, decode the </a:t>
+            </a:r>
+            <a:r>
+              <a:rPr>
+                <a:latin typeface="Courier"/>
+              </a:rPr>
+              <a:t>summary()</a:t>
+            </a:r>
+            <a:r>
+              <a:rPr/>
+              <a:t> table, and pull the slope, intercept, and R². Predict each number before it prints.</a:t>
+            </a:r>
+          </a:p>
+        </p:txBody>
+      </p:sp>
+    </p:spTree>
+  </p:cSld>
+</p:sld>
+</file>
+
+<file path=ppt/slides/slide23.xml><?xml version="1.0" encoding="utf-8"?>
+<p:sld xmlns:a="http://schemas.openxmlformats.org/drawingml/2006/main" xmlns:r="http://schemas.openxmlformats.org/officeDocument/2006/relationships" xmlns:p="http://schemas.openxmlformats.org/presentationml/2006/main">
+  <p:cSld>
+    <p:spTree>
+      <p:nvGrpSpPr>
+        <p:cNvPr id="1" name=""/>
+        <p:cNvGrpSpPr/>
+        <p:nvPr/>
+      </p:nvGrpSpPr>
+      <p:grpSpPr>
+        <a:xfrm>
+          <a:off x="0" y="0"/>
+          <a:ext cx="0" cy="0"/>
+          <a:chOff x="0" y="0"/>
+          <a:chExt cx="0" cy="0"/>
+        </a:xfrm>
+      </p:grpSpPr>
+      <p:sp>
+        <p:nvSpPr>
+          <p:cNvPr id="2" name="Title 1"/>
+          <p:cNvSpPr>
+            <a:spLocks noGrp="1"/>
+          </p:cNvSpPr>
+          <p:nvPr>
+            <p:ph type="title"/>
+          </p:nvPr>
+        </p:nvSpPr>
+        <p:spPr>
+          <a:xfrm>
+            <a:off x="0" y="0"/>
+            <a:ext cx="9144000" cy="582780"/>
+          </a:xfrm>
+        </p:spPr>
+        <p:txBody>
+          <a:bodyPr/>
+          <a:lstStyle/>
+          <a:p>
+            <a:pPr lvl="0" indent="0" marL="0">
+              <a:buNone/>
+            </a:pPr>
+            <a:r>
+              <a:rPr/>
+              <a:t>🧩 Chunk 3 of 4 · Visualize &amp; Check Assumptions</a:t>
+            </a:r>
+          </a:p>
+        </p:txBody>
+      </p:sp>
+      <p:sp>
+        <p:nvSpPr>
+          <p:cNvPr id="3" name="Content Placeholder 2"/>
+          <p:cNvSpPr>
+            <a:spLocks noGrp="1"/>
+          </p:cNvSpPr>
+          <p:nvPr>
+            <p:ph idx="1"/>
+          </p:nvPr>
+        </p:nvSpPr>
+        <p:spPr/>
+        <p:txBody>
+          <a:bodyPr/>
+          <a:lstStyle/>
+          <a:p>
+            <a:pPr lvl="0" indent="0" marL="0">
+              <a:buNone/>
+            </a:pPr>
+            <a:r>
+              <a:rPr b="1"/>
+              <a:t>We will cover:</a:t>
+            </a:r>
+            <a:r>
+              <a:rPr/>
+              <a:t> the calibration curve with its CI band, the residuals-vs-fitted plot, and the QQ plot + Shapiro-Wilk on the residuals.</a:t>
+            </a:r>
+          </a:p>
+          <a:p>
+            <a:pPr lvl="0" indent="0" marL="1270000">
+              <a:buNone/>
+            </a:pPr>
+            <a:r>
+              <a:rPr sz="2000" b="1"/>
+              <a:t>Tip</a:t>
+            </a:r>
+          </a:p>
+          <a:p>
+            <a:pPr lvl="0" indent="0" marL="1270000">
+              <a:buNone/>
+            </a:pPr>
+            <a:r>
+              <a:rPr sz="2000" b="1"/>
+              <a:t>🖐 After this chunk: Activity Parts 8–10</a:t>
+            </a:r>
+            <a:r>
+              <a:rPr sz="2000"/>
+              <a:t> (plot the curve; check the residual and QQ/Shapiro assumptions).</a:t>
+            </a:r>
+          </a:p>
+        </p:txBody>
+      </p:sp>
+    </p:spTree>
+  </p:cSld>
+</p:sld>
+</file>
+
+<file path=ppt/slides/slide24.xml><?xml version="1.0" encoding="utf-8"?>
 <p:sld xmlns:a="http://schemas.openxmlformats.org/drawingml/2006/main" xmlns:r="http://schemas.openxmlformats.org/officeDocument/2006/relationships" xmlns:p="http://schemas.openxmlformats.org/presentationml/2006/main">
   <p:cSld>
     <p:spTree>
@@ -8580,7 +10408,7 @@
 </p:sld>
 </file>
 
-<file path=ppt/slides/slide17.xml><?xml version="1.0" encoding="utf-8"?>
+<file path=ppt/slides/slide25.xml><?xml version="1.0" encoding="utf-8"?>
 <p:sld xmlns:a="http://schemas.openxmlformats.org/drawingml/2006/main" xmlns:r="http://schemas.openxmlformats.org/officeDocument/2006/relationships" xmlns:p="http://schemas.openxmlformats.org/presentationml/2006/main">
   <p:cSld>
     <p:spTree>
@@ -8609,8 +10437,8 @@
         </p:nvSpPr>
         <p:spPr>
           <a:xfrm>
-            <a:off x="139485" y="78119"/>
-            <a:ext cx="8229600" cy="607682"/>
+            <a:off x="0" y="0"/>
+            <a:ext cx="9144000" cy="582780"/>
           </a:xfrm>
         </p:spPr>
         <p:txBody>
@@ -8627,6 +10455,66 @@
           </a:p>
         </p:txBody>
       </p:sp>
+      <p:sp>
+        <p:nvSpPr>
+          <p:cNvPr id="3" name="Content Placeholder 2"/>
+          <p:cNvSpPr>
+            <a:spLocks noGrp="1"/>
+          </p:cNvSpPr>
+          <p:nvPr>
+            <p:ph idx="1"/>
+          </p:nvPr>
+        </p:nvSpPr>
+        <p:spPr/>
+        <p:txBody>
+          <a:bodyPr/>
+          <a:lstStyle/>
+          <a:p>
+            <a:pPr lvl="0" indent="0" marL="1270000">
+              <a:buNone/>
+            </a:pPr>
+            <a:r>
+              <a:rPr sz="2000" b="1"/>
+              <a:t>Note</a:t>
+            </a:r>
+          </a:p>
+          <a:p>
+            <a:pPr lvl="0" indent="0" marL="1270000">
+              <a:buNone/>
+            </a:pPr>
+            <a:r>
+              <a:rPr sz="2000" b="1"/>
+              <a:t>🔮 Predict first:</a:t>
+            </a:r>
+            <a:r>
+              <a:rPr sz="2000"/>
+              <a:t> If the line fits well, what should the residuals-vs-fitted plot look like — a random flat cloud, a curve, or a funnel? Predict, then look.</a:t>
+            </a:r>
+          </a:p>
+        </p:txBody>
+      </p:sp>
+    </p:spTree>
+  </p:cSld>
+</p:sld>
+</file>
+
+<file path=ppt/slides/slide26.xml><?xml version="1.0" encoding="utf-8"?>
+<p:sld xmlns:a="http://schemas.openxmlformats.org/drawingml/2006/main" xmlns:r="http://schemas.openxmlformats.org/officeDocument/2006/relationships" xmlns:p="http://schemas.openxmlformats.org/presentationml/2006/main">
+  <p:cSld>
+    <p:spTree>
+      <p:nvGrpSpPr>
+        <p:cNvPr id="1" name=""/>
+        <p:cNvGrpSpPr/>
+        <p:nvPr/>
+      </p:nvGrpSpPr>
+      <p:grpSpPr>
+        <a:xfrm>
+          <a:off x="0" y="0"/>
+          <a:ext cx="0" cy="0"/>
+          <a:chOff x="0" y="0"/>
+          <a:chExt cx="0" cy="0"/>
+        </a:xfrm>
+      </p:grpSpPr>
       <p:sp>
         <p:nvSpPr>
           <p:cNvPr id="3" name="Text Placeholder 2"/>
@@ -9431,7 +11319,7 @@
 </p:sld>
 </file>
 
-<file path=ppt/slides/slide18.xml><?xml version="1.0" encoding="utf-8"?>
+<file path=ppt/slides/slide27.xml><?xml version="1.0" encoding="utf-8"?>
 <p:sld xmlns:a="http://schemas.openxmlformats.org/drawingml/2006/main" xmlns:r="http://schemas.openxmlformats.org/officeDocument/2006/relationships" xmlns:p="http://schemas.openxmlformats.org/presentationml/2006/main">
   <p:cSld>
     <p:spTree>
@@ -10136,7 +12024,197 @@
 </p:sld>
 </file>
 
-<file path=ppt/slides/slide19.xml><?xml version="1.0" encoding="utf-8"?>
+<file path=ppt/slides/slide28.xml><?xml version="1.0" encoding="utf-8"?>
+<p:sld xmlns:a="http://schemas.openxmlformats.org/drawingml/2006/main" xmlns:r="http://schemas.openxmlformats.org/officeDocument/2006/relationships" xmlns:p="http://schemas.openxmlformats.org/presentationml/2006/main">
+  <p:cSld>
+    <p:spTree>
+      <p:nvGrpSpPr>
+        <p:cNvPr id="1" name=""/>
+        <p:cNvGrpSpPr/>
+        <p:nvPr/>
+      </p:nvGrpSpPr>
+      <p:grpSpPr>
+        <a:xfrm>
+          <a:off x="0" y="0"/>
+          <a:ext cx="0" cy="0"/>
+          <a:chOff x="0" y="0"/>
+          <a:chExt cx="0" cy="0"/>
+        </a:xfrm>
+      </p:grpSpPr>
+      <p:sp>
+        <p:nvSpPr>
+          <p:cNvPr id="2" name="Title 1"/>
+          <p:cNvSpPr>
+            <a:spLocks noGrp="1"/>
+          </p:cNvSpPr>
+          <p:nvPr>
+            <p:ph type="title"/>
+          </p:nvPr>
+        </p:nvSpPr>
+        <p:spPr>
+          <a:xfrm>
+            <a:off x="0" y="0"/>
+            <a:ext cx="9144000" cy="582780"/>
+          </a:xfrm>
+        </p:spPr>
+        <p:txBody>
+          <a:bodyPr/>
+          <a:lstStyle/>
+          <a:p>
+            <a:pPr lvl="0" indent="0" marL="0">
+              <a:buNone/>
+            </a:pPr>
+            <a:r>
+              <a:rPr/>
+              <a:t>🛑 Pause — Do Activity Parts 8–10 Now</a:t>
+            </a:r>
+          </a:p>
+        </p:txBody>
+      </p:sp>
+      <p:sp>
+        <p:nvSpPr>
+          <p:cNvPr id="3" name="Content Placeholder 2"/>
+          <p:cNvSpPr>
+            <a:spLocks noGrp="1"/>
+          </p:cNvSpPr>
+          <p:nvPr>
+            <p:ph idx="1"/>
+          </p:nvPr>
+        </p:nvSpPr>
+        <p:spPr/>
+        <p:txBody>
+          <a:bodyPr/>
+          <a:lstStyle/>
+          <a:p>
+            <a:pPr lvl="0" indent="0" marL="0">
+              <a:buNone/>
+            </a:pPr>
+            <a:r>
+              <a:rPr/>
+              <a:t>Plot the calibration curve, then check the residual plot and the QQ/Shapiro test on the residuals. Predict each diagnostic before you run it.</a:t>
+            </a:r>
+          </a:p>
+        </p:txBody>
+      </p:sp>
+    </p:spTree>
+  </p:cSld>
+</p:sld>
+</file>
+
+<file path=ppt/slides/slide29.xml><?xml version="1.0" encoding="utf-8"?>
+<p:sld xmlns:a="http://schemas.openxmlformats.org/drawingml/2006/main" xmlns:r="http://schemas.openxmlformats.org/officeDocument/2006/relationships" xmlns:p="http://schemas.openxmlformats.org/presentationml/2006/main">
+  <p:cSld>
+    <p:spTree>
+      <p:nvGrpSpPr>
+        <p:cNvPr id="1" name=""/>
+        <p:cNvGrpSpPr/>
+        <p:nvPr/>
+      </p:nvGrpSpPr>
+      <p:grpSpPr>
+        <a:xfrm>
+          <a:off x="0" y="0"/>
+          <a:ext cx="0" cy="0"/>
+          <a:chOff x="0" y="0"/>
+          <a:chExt cx="0" cy="0"/>
+        </a:xfrm>
+      </p:grpSpPr>
+      <p:sp>
+        <p:nvSpPr>
+          <p:cNvPr id="2" name="Title 1"/>
+          <p:cNvSpPr>
+            <a:spLocks noGrp="1"/>
+          </p:cNvSpPr>
+          <p:nvPr>
+            <p:ph type="title"/>
+          </p:nvPr>
+        </p:nvSpPr>
+        <p:spPr>
+          <a:xfrm>
+            <a:off x="0" y="0"/>
+            <a:ext cx="9144000" cy="582780"/>
+          </a:xfrm>
+        </p:spPr>
+        <p:txBody>
+          <a:bodyPr/>
+          <a:lstStyle/>
+          <a:p>
+            <a:pPr lvl="0" indent="0" marL="0">
+              <a:buNone/>
+            </a:pPr>
+            <a:r>
+              <a:rPr/>
+              <a:t>🧩 Chunk 4 of 4 · Predict &amp; Report</a:t>
+            </a:r>
+          </a:p>
+        </p:txBody>
+      </p:sp>
+      <p:sp>
+        <p:nvSpPr>
+          <p:cNvPr id="3" name="Content Placeholder 2"/>
+          <p:cNvSpPr>
+            <a:spLocks noGrp="1"/>
+          </p:cNvSpPr>
+          <p:nvPr>
+            <p:ph idx="1"/>
+          </p:nvPr>
+        </p:nvSpPr>
+        <p:spPr/>
+        <p:txBody>
+          <a:bodyPr/>
+          <a:lstStyle/>
+          <a:p>
+            <a:pPr lvl="0" indent="0" marL="0">
+              <a:buNone/>
+            </a:pPr>
+            <a:r>
+              <a:rPr b="1"/>
+              <a:t>We will cover:</a:t>
+            </a:r>
+            <a:r>
+              <a:rPr/>
+              <a:t> turning a tracing mass into a predicted area, </a:t>
+            </a:r>
+            <a:r>
+              <a:rPr>
+                <a:latin typeface="Courier"/>
+              </a:rPr>
+              <a:t>predict()</a:t>
+            </a:r>
+            <a:r>
+              <a:rPr/>
+              <a:t> with confidence vs prediction intervals, and writing the results paragraph.</a:t>
+            </a:r>
+          </a:p>
+          <a:p>
+            <a:pPr lvl="0" indent="0" marL="1270000">
+              <a:buNone/>
+            </a:pPr>
+            <a:r>
+              <a:rPr sz="2000" b="1"/>
+              <a:t>Tip</a:t>
+            </a:r>
+          </a:p>
+          <a:p>
+            <a:pPr lvl="0" indent="0" marL="1270000">
+              <a:buNone/>
+            </a:pPr>
+            <a:r>
+              <a:rPr sz="2000" b="1"/>
+              <a:t>🖐 After this chunk: Activity Parts 11–12</a:t>
+            </a:r>
+            <a:r>
+              <a:rPr sz="2000"/>
+              <a:t> (predict leaf area; write the results paragraph).</a:t>
+            </a:r>
+          </a:p>
+        </p:txBody>
+      </p:sp>
+    </p:spTree>
+  </p:cSld>
+</p:sld>
+</file>
+
+<file path=ppt/slides/slide3.xml><?xml version="1.0" encoding="utf-8"?>
 <p:sld xmlns:a="http://schemas.openxmlformats.org/drawingml/2006/main" xmlns:r="http://schemas.openxmlformats.org/officeDocument/2006/relationships" xmlns:p="http://schemas.openxmlformats.org/presentationml/2006/main">
   <p:cSld>
     <p:spTree>
@@ -10181,11 +12259,482 @@
             </a:pPr>
             <a:r>
               <a:rPr/>
-              <a:t>Predict Leaf Area from Tracing Mass</a:t>
+              <a:t>Goals for Today</a:t>
             </a:r>
           </a:p>
         </p:txBody>
       </p:sp>
+      <mc:AlternateContent xmlns:mc="http://schemas.openxmlformats.org/markup-compatibility/2006">
+        <mc:Choice xmlns:a14="http://schemas.microsoft.com/office/drawing/2010/main" Requires="a14">
+          <p:sp>
+            <p:nvSpPr>
+              <p:cNvPr id="3" name="Content Placeholder 2"/>
+              <p:cNvSpPr>
+                <a:spLocks noGrp="1"/>
+              </p:cNvSpPr>
+              <p:nvPr>
+                <p:ph idx="1" sz="half"/>
+              </p:nvPr>
+            </p:nvSpPr>
+            <p:spPr/>
+            <p:txBody>
+              <a:bodyPr/>
+              <a:lstStyle/>
+              <a:p>
+                <a:pPr lvl="0"/>
+                <a:r>
+                  <a:rPr/>
+                  <a:t>Understand what linear regression does and when to use it</a:t>
+                </a:r>
+              </a:p>
+              <a:p>
+                <a:pPr lvl="0"/>
+                <a:r>
+                  <a:rPr/>
+                  <a:t>Learn the equation: </a:t>
+                </a:r>
+                <a14:m>
+                  <m:oMath xmlns:m="http://schemas.openxmlformats.org/officeDocument/2006/math">
+                    <m:acc>
+                      <m:accPr>
+                        <m:chr m:val="̂"/>
+                      </m:accPr>
+                      <m:e>
+                        <m:r>
+                          <m:t>Y</m:t>
+                        </m:r>
+                      </m:e>
+                    </m:acc>
+                    <m:r>
+                      <m:rPr>
+                        <m:sty m:val="p"/>
+                      </m:rPr>
+                      <m:t>=</m:t>
+                    </m:r>
+                    <m:r>
+                      <m:t>a</m:t>
+                    </m:r>
+                    <m:r>
+                      <m:rPr>
+                        <m:sty m:val="p"/>
+                      </m:rPr>
+                      <m:t>+</m:t>
+                    </m:r>
+                    <m:r>
+                      <m:t>b</m:t>
+                    </m:r>
+                    <m:r>
+                      <m:t>X</m:t>
+                    </m:r>
+                  </m:oMath>
+                </a14:m>
+              </a:p>
+              <a:p>
+                <a:pPr lvl="1"/>
+                <a:r>
+                  <a:rPr/>
+                  <a:t>slope </a:t>
+                </a:r>
+                <a:r>
+                  <a:rPr i="1"/>
+                  <a:t>b</a:t>
+                </a:r>
+                <a:r>
+                  <a:rPr/>
+                  <a:t>, intercept </a:t>
+                </a:r>
+                <a:r>
+                  <a:rPr i="1"/>
+                  <a:t>a</a:t>
+                </a:r>
+                <a:r>
+                  <a:rPr/>
+                  <a:t>, residuals, R²</a:t>
+                </a:r>
+              </a:p>
+              <a:p>
+                <a:pPr lvl="0"/>
+                <a:r>
+                  <a:rPr/>
+                  <a:t>Understand </a:t>
+                </a:r>
+                <a:r>
+                  <a:rPr b="1"/>
+                  <a:t>least squares</a:t>
+                </a:r>
+                <a:r>
+                  <a:rPr/>
+                  <a:t> — what the line minimizes</a:t>
+                </a:r>
+              </a:p>
+              <a:p>
+                <a:pPr lvl="0"/>
+                <a:r>
+                  <a:rPr/>
+                  <a:t>Fit a model in R with </a:t>
+                </a:r>
+                <a:r>
+                  <a:rPr>
+                    <a:latin typeface="Courier"/>
+                  </a:rPr>
+                  <a:t>lm()</a:t>
+                </a:r>
+                <a:r>
+                  <a:rPr/>
+                  <a:t> and read every line of </a:t>
+                </a:r>
+                <a:r>
+                  <a:rPr>
+                    <a:latin typeface="Courier"/>
+                  </a:rPr>
+                  <a:t>summary()</a:t>
+                </a:r>
+              </a:p>
+              <a:p>
+                <a:pPr lvl="0"/>
+                <a:r>
+                  <a:rPr b="1"/>
+                  <a:t>Apply it:</a:t>
+                </a:r>
+                <a:r>
+                  <a:rPr/>
+                  <a:t> build a calibration curve to predict leaf area from paper tracing mass</a:t>
+                </a:r>
+              </a:p>
+              <a:p>
+                <a:pPr lvl="0"/>
+                <a:r>
+                  <a:rPr/>
+                  <a:t>Check all four assumptions of regression</a:t>
+                </a:r>
+              </a:p>
+              <a:p>
+                <a:pPr lvl="0"/>
+                <a:r>
+                  <a:rPr/>
+                  <a:t>Use </a:t>
+                </a:r>
+                <a:r>
+                  <a:rPr>
+                    <a:latin typeface="Courier"/>
+                  </a:rPr>
+                  <a:t>predict()</a:t>
+                </a:r>
+                <a:r>
+                  <a:rPr/>
+                  <a:t> to make predictions with intervals</a:t>
+                </a:r>
+              </a:p>
+              <a:p>
+                <a:pPr lvl="0"/>
+                <a:r>
+                  <a:rPr/>
+                  <a:t>Use </a:t>
+                </a:r>
+                <a:r>
+                  <a:rPr>
+                    <a:latin typeface="Courier"/>
+                  </a:rPr>
+                  <a:t>mutate()</a:t>
+                </a:r>
+                <a:r>
+                  <a:rPr/>
+                  <a:t> to add model results to a data frame</a:t>
+                </a:r>
+              </a:p>
+              <a:p>
+                <a:pPr lvl="0" indent="0" marL="1270000">
+                  <a:buNone/>
+                </a:pPr>
+                <a:r>
+                  <a:rPr sz="2000" b="1"/>
+                  <a:t>Tip</a:t>
+                </a:r>
+              </a:p>
+              <a:p>
+                <a:pPr lvl="0" indent="0" marL="1270000">
+                  <a:buNone/>
+                </a:pPr>
+                <a:r>
+                  <a:rPr sz="2000" b="1"/>
+                  <a:t>🖐 Try it yourself</a:t>
+                </a:r>
+              </a:p>
+              <a:p>
+                <a:pPr lvl="0" indent="0" marL="1270000">
+                  <a:buNone/>
+                </a:pPr>
+                <a:r>
+                  <a:rPr sz="2000"/>
+                  <a:t>By the end you will predict leaf area from a tracing weight.</a:t>
+                </a:r>
+              </a:p>
+            </p:txBody>
+          </p:sp>
+        </mc:Choice>
+      </mc:AlternateContent>
+      <p:sp>
+        <p:nvSpPr>
+          <p:cNvPr id="4" name="Content Placeholder 3"/>
+          <p:cNvSpPr>
+            <a:spLocks noGrp="1"/>
+          </p:cNvSpPr>
+          <p:nvPr>
+            <p:ph idx="2" sz="half"/>
+          </p:nvPr>
+        </p:nvSpPr>
+        <p:spPr/>
+        <p:txBody>
+          <a:bodyPr/>
+          <a:lstStyle/>
+          <a:p>
+            <a:pPr lvl="0" indent="0" marL="0">
+              <a:buNone/>
+            </a:pPr>
+            <a:r>
+              <a:rPr b="1"/>
+              <a:t>Tools today:</a:t>
+            </a:r>
+          </a:p>
+          <a:p>
+            <a:pPr lvl="0"/>
+            <a:r>
+              <a:rPr>
+                <a:latin typeface="Courier"/>
+              </a:rPr>
+              <a:t>readxl</a:t>
+            </a:r>
+            <a:r>
+              <a:rPr/>
+              <a:t>, </a:t>
+            </a:r>
+            <a:r>
+              <a:rPr>
+                <a:latin typeface="Courier"/>
+              </a:rPr>
+              <a:t>tidyverse</a:t>
+            </a:r>
+          </a:p>
+          <a:p>
+            <a:pPr lvl="0" indent="0" marL="0">
+              <a:buNone/>
+            </a:pPr>
+            <a:r>
+              <a:rPr b="1"/>
+              <a:t>Textbook:</a:t>
+            </a:r>
+          </a:p>
+          <a:p>
+            <a:pPr lvl="0"/>
+            <a:r>
+              <a:rPr/>
+              <a:t>📖 Whitlock &amp; Schluter </a:t>
+            </a:r>
+            <a:r>
+              <a:rPr i="1"/>
+              <a:t>Analysis of Biological Data</a:t>
+            </a:r>
+            <a:r>
+              <a:rPr/>
+              <a:t> 2nd ed.</a:t>
+            </a:r>
+          </a:p>
+          <a:p>
+            <a:pPr lvl="0"/>
+            <a:r>
+              <a:rPr b="1"/>
+              <a:t>Chapter 17 — Regression</a:t>
+            </a:r>
+            <a:r>
+              <a:rPr/>
+              <a:t> (pp. 539–575)</a:t>
+            </a:r>
+          </a:p>
+          <a:p>
+            <a:pPr lvl="1"/>
+            <a:r>
+              <a:rPr/>
+              <a:t>§17.1 Linear regression</a:t>
+            </a:r>
+          </a:p>
+          <a:p>
+            <a:pPr lvl="1"/>
+            <a:r>
+              <a:rPr/>
+              <a:t>§17.3 Testing slope hypotheses</a:t>
+            </a:r>
+          </a:p>
+          <a:p>
+            <a:pPr lvl="1"/>
+            <a:r>
+              <a:rPr/>
+              <a:t>§17.4 R²</a:t>
+            </a:r>
+          </a:p>
+          <a:p>
+            <a:pPr lvl="1"/>
+            <a:r>
+              <a:rPr/>
+              <a:t>§17.5 Assumptions</a:t>
+            </a:r>
+          </a:p>
+          <a:p>
+            <a:pPr lvl="0" indent="0" marL="0">
+              <a:buNone/>
+            </a:pPr>
+            <a:r>
+              <a:rPr b="1"/>
+              <a:t>Naming conventions:</a:t>
+            </a:r>
+          </a:p>
+          <a:p>
+            <a:pPr lvl="0"/>
+            <a:r>
+              <a:rPr/>
+              <a:t>models → </a:t>
+            </a:r>
+            <a:r>
+              <a:rPr>
+                <a:latin typeface="Courier"/>
+              </a:rPr>
+              <a:t>_model</a:t>
+            </a:r>
+          </a:p>
+          <a:p>
+            <a:pPr lvl="0"/>
+            <a:r>
+              <a:rPr/>
+              <a:t>plots → </a:t>
+            </a:r>
+            <a:r>
+              <a:rPr>
+                <a:latin typeface="Courier"/>
+              </a:rPr>
+              <a:t>_plot</a:t>
+            </a:r>
+          </a:p>
+        </p:txBody>
+      </p:sp>
+    </p:spTree>
+  </p:cSld>
+</p:sld>
+</file>
+
+<file path=ppt/slides/slide30.xml><?xml version="1.0" encoding="utf-8"?>
+<p:sld xmlns:a="http://schemas.openxmlformats.org/drawingml/2006/main" xmlns:r="http://schemas.openxmlformats.org/officeDocument/2006/relationships" xmlns:p="http://schemas.openxmlformats.org/presentationml/2006/main">
+  <p:cSld>
+    <p:spTree>
+      <p:nvGrpSpPr>
+        <p:cNvPr id="1" name=""/>
+        <p:cNvGrpSpPr/>
+        <p:nvPr/>
+      </p:nvGrpSpPr>
+      <p:grpSpPr>
+        <a:xfrm>
+          <a:off x="0" y="0"/>
+          <a:ext cx="0" cy="0"/>
+          <a:chOff x="0" y="0"/>
+          <a:chExt cx="0" cy="0"/>
+        </a:xfrm>
+      </p:grpSpPr>
+      <p:sp>
+        <p:nvSpPr>
+          <p:cNvPr id="2" name="Title 1"/>
+          <p:cNvSpPr>
+            <a:spLocks noGrp="1"/>
+          </p:cNvSpPr>
+          <p:nvPr>
+            <p:ph type="title"/>
+          </p:nvPr>
+        </p:nvSpPr>
+        <p:spPr>
+          <a:xfrm>
+            <a:off x="0" y="0"/>
+            <a:ext cx="9144000" cy="582780"/>
+          </a:xfrm>
+        </p:spPr>
+        <p:txBody>
+          <a:bodyPr/>
+          <a:lstStyle/>
+          <a:p>
+            <a:pPr lvl="0" indent="0" marL="0">
+              <a:buNone/>
+            </a:pPr>
+            <a:r>
+              <a:rPr/>
+              <a:t>Predict Leaf Area from Tracing Mass</a:t>
+            </a:r>
+          </a:p>
+        </p:txBody>
+      </p:sp>
+      <p:sp>
+        <p:nvSpPr>
+          <p:cNvPr id="3" name="Content Placeholder 2"/>
+          <p:cNvSpPr>
+            <a:spLocks noGrp="1"/>
+          </p:cNvSpPr>
+          <p:nvPr>
+            <p:ph idx="1"/>
+          </p:nvPr>
+        </p:nvSpPr>
+        <p:spPr/>
+        <p:txBody>
+          <a:bodyPr/>
+          <a:lstStyle/>
+          <a:p>
+            <a:pPr lvl="0" indent="0" marL="1270000">
+              <a:buNone/>
+            </a:pPr>
+            <a:r>
+              <a:rPr sz="2000" b="1"/>
+              <a:t>Note</a:t>
+            </a:r>
+          </a:p>
+          <a:p>
+            <a:pPr lvl="0" indent="0" marL="1270000">
+              <a:buNone/>
+            </a:pPr>
+            <a:r>
+              <a:rPr sz="2000" b="1"/>
+              <a:t>🔮 Predict first:</a:t>
+            </a:r>
+            <a:r>
+              <a:rPr sz="2000"/>
+              <a:t> The sunny tracing weighs 0.092 g, the shady 0.138 g. Before running — which predicts the </a:t>
+            </a:r>
+            <a:r>
+              <a:rPr sz="2000" b="1"/>
+              <a:t>larger</a:t>
+            </a:r>
+            <a:r>
+              <a:rPr sz="2000"/>
+              <a:t> area, and does that match “shady leaves are bigger”?</a:t>
+            </a:r>
+          </a:p>
+        </p:txBody>
+      </p:sp>
+    </p:spTree>
+  </p:cSld>
+</p:sld>
+</file>
+
+<file path=ppt/slides/slide31.xml><?xml version="1.0" encoding="utf-8"?>
+<p:sld xmlns:a="http://schemas.openxmlformats.org/drawingml/2006/main" xmlns:r="http://schemas.openxmlformats.org/officeDocument/2006/relationships" xmlns:p="http://schemas.openxmlformats.org/presentationml/2006/main">
+  <p:cSld>
+    <p:spTree>
+      <p:nvGrpSpPr>
+        <p:cNvPr id="1" name=""/>
+        <p:cNvGrpSpPr/>
+        <p:nvPr/>
+      </p:nvGrpSpPr>
+      <p:grpSpPr>
+        <a:xfrm>
+          <a:off x="0" y="0"/>
+          <a:ext cx="0" cy="0"/>
+          <a:chOff x="0" y="0"/>
+          <a:chExt cx="0" cy="0"/>
+        </a:xfrm>
+      </p:grpSpPr>
       <p:sp>
         <p:nvSpPr>
           <p:cNvPr id="3" name="Content Placeholder 2"/>
@@ -10995,7 +13544,7 @@
 </p:sld>
 </file>
 
-<file path=ppt/slides/slide2.xml><?xml version="1.0" encoding="utf-8"?>
+<file path=ppt/slides/slide32.xml><?xml version="1.0" encoding="utf-8"?>
 <p:sld xmlns:a="http://schemas.openxmlformats.org/drawingml/2006/main" xmlns:r="http://schemas.openxmlformats.org/officeDocument/2006/relationships" xmlns:p="http://schemas.openxmlformats.org/presentationml/2006/main">
   <p:cSld>
     <p:spTree>
@@ -11025,8 +13574,11 @@
         <p:spPr>
           <a:xfrm>
             <a:off x="0" y="0"/>
-            <a:ext cx="9144000" cy="582780"/>
+            <a:ext cx="9144000" cy="602780"/>
           </a:xfrm>
+          <a:solidFill>
+            <a:srgbClr val="1A1A2E"/>
+          </a:solidFill>
         </p:spPr>
         <p:txBody>
           <a:bodyPr/>
@@ -11037,7 +13589,7 @@
             </a:pPr>
             <a:r>
               <a:rPr/>
-              <a:t>Where we left off (Lecture 4.5)</a:t>
+              <a:t>Live Demo — Watch It Break (on purpose)</a:t>
             </a:r>
           </a:p>
         </p:txBody>
@@ -11049,7 +13601,7 @@
             <a:spLocks noGrp="1"/>
           </p:cNvSpPr>
           <p:nvPr>
-            <p:ph idx="1"/>
+            <p:ph idx="1" sz="half"/>
           </p:nvPr>
         </p:nvSpPr>
         <p:spPr/>
@@ -11057,168 +13609,301 @@
           <a:bodyPr/>
           <a:lstStyle/>
           <a:p>
-            <a:pPr lvl="0"/>
+            <a:pPr lvl="0" indent="0" marL="0">
+              <a:buNone/>
+            </a:pPr>
+            <a:r>
+              <a:rPr>
+                <a:latin typeface="Courier"/>
+              </a:rPr>
+              <a:t>predict()</a:t>
+            </a:r>
+            <a:r>
+              <a:rPr/>
+              <a:t> needs the </a:t>
+            </a:r>
             <a:r>
               <a:rPr b="1"/>
-              <a:t>Quarto</a:t>
+              <a:t>exact</a:t>
             </a:r>
             <a:r>
               <a:rPr/>
-              <a:t> — one </a:t>
-            </a:r>
-            <a:r>
-              <a:rPr>
-                <a:latin typeface="Courier"/>
-              </a:rPr>
-              <a:t>.qmd</a:t>
-            </a:r>
+              <a:t> predictor column name. I’ll get it wrong:</a:t>
+            </a:r>
+          </a:p>
+          <a:p>
+            <a:pPr lvl="0" indent="0">
+              <a:buNone/>
+            </a:pPr>
+            <a:r>
+              <a:rPr>
+                <a:solidFill>
+                  <a:srgbClr val="5E5E5E"/>
+                </a:solidFill>
+                <a:latin typeface="Courier"/>
+              </a:rPr>
+              <a:t># The column is mass_g, but I typed mass</a:t>
+            </a:r>
+            <a:br/>
+            <a:r>
+              <a:rPr>
+                <a:solidFill>
+                  <a:srgbClr val="003B4F"/>
+                </a:solidFill>
+                <a:latin typeface="Courier"/>
+              </a:rPr>
+              <a:t>new &lt;- </a:t>
+            </a:r>
+            <a:r>
+              <a:rPr>
+                <a:solidFill>
+                  <a:srgbClr val="4758AB"/>
+                </a:solidFill>
+                <a:latin typeface="Courier"/>
+              </a:rPr>
+              <a:t>tibble</a:t>
+            </a:r>
+            <a:r>
+              <a:rPr>
+                <a:solidFill>
+                  <a:srgbClr val="003B4F"/>
+                </a:solidFill>
+                <a:latin typeface="Courier"/>
+              </a:rPr>
+              <a:t>(</a:t>
+            </a:r>
+            <a:r>
+              <a:rPr>
+                <a:solidFill>
+                  <a:srgbClr val="657422"/>
+                </a:solidFill>
+                <a:latin typeface="Courier"/>
+              </a:rPr>
+              <a:t>mass =</a:t>
+            </a:r>
+            <a:r>
+              <a:rPr>
+                <a:solidFill>
+                  <a:srgbClr val="003B4F"/>
+                </a:solidFill>
+                <a:latin typeface="Courier"/>
+              </a:rPr>
+              <a:t> </a:t>
+            </a:r>
+            <a:r>
+              <a:rPr>
+                <a:solidFill>
+                  <a:srgbClr val="AD0000"/>
+                </a:solidFill>
+                <a:latin typeface="Courier"/>
+              </a:rPr>
+              <a:t>0.092</a:t>
+            </a:r>
+            <a:r>
+              <a:rPr>
+                <a:solidFill>
+                  <a:srgbClr val="003B4F"/>
+                </a:solidFill>
+                <a:latin typeface="Courier"/>
+              </a:rPr>
+              <a:t>)</a:t>
+            </a:r>
+            <a:br/>
+            <a:r>
+              <a:rPr>
+                <a:solidFill>
+                  <a:srgbClr val="4758AB"/>
+                </a:solidFill>
+                <a:latin typeface="Courier"/>
+              </a:rPr>
+              <a:t>predict</a:t>
+            </a:r>
+            <a:r>
+              <a:rPr>
+                <a:solidFill>
+                  <a:srgbClr val="003B4F"/>
+                </a:solidFill>
+                <a:latin typeface="Courier"/>
+              </a:rPr>
+              <a:t>(paper_lm_model, </a:t>
+            </a:r>
+            <a:r>
+              <a:rPr>
+                <a:solidFill>
+                  <a:srgbClr val="657422"/>
+                </a:solidFill>
+                <a:latin typeface="Courier"/>
+              </a:rPr>
+              <a:t>newdata =</a:t>
+            </a:r>
+            <a:r>
+              <a:rPr>
+                <a:solidFill>
+                  <a:srgbClr val="003B4F"/>
+                </a:solidFill>
+                <a:latin typeface="Courier"/>
+              </a:rPr>
+              <a:t> new)</a:t>
+            </a:r>
+          </a:p>
+          <a:p>
+            <a:pPr lvl="0" indent="0" marL="0">
+              <a:buNone/>
+            </a:pPr>
             <a:r>
               <a:rPr/>
-              <a:t> file holds your </a:t>
-            </a:r>
-            <a:r>
-              <a:rPr b="1"/>
-              <a:t>writing </a:t>
-            </a:r>
-            <a:r>
-              <a:rPr b="1" i="1"/>
-              <a:t>and</a:t>
-            </a:r>
-            <a:r>
-              <a:rPr b="1"/>
-              <a:t> your code</a:t>
-            </a:r>
+              <a:t>R errors:</a:t>
+            </a:r>
+          </a:p>
+          <a:p>
+            <a:pPr lvl="0" indent="0">
+              <a:buNone/>
+            </a:pPr>
+            <a:r>
+              <a:rPr>
+                <a:latin typeface="Courier"/>
+              </a:rPr>
+              <a:t>Error in eval(predvars, data, env) :
+  object 'mass_g' not found</a:t>
+            </a:r>
+          </a:p>
+          <a:p>
+            <a:pPr lvl="0" indent="0" marL="0">
+              <a:buNone/>
+            </a:pPr>
             <a:r>
               <a:rPr/>
-              <a:t>, and renders to Word, HTML, or PowerPoint</a:t>
-            </a:r>
-          </a:p>
-          <a:p>
-            <a:pPr lvl="0"/>
-            <a:r>
-              <a:rPr b="1"/>
-              <a:t>Three ingredients</a:t>
-            </a:r>
-            <a:r>
-              <a:rPr/>
-              <a:t> — YAML front matter, Markdown text, and named code chunks</a:t>
-            </a:r>
-          </a:p>
-          <a:p>
-            <a:pPr lvl="0"/>
-            <a:r>
-              <a:rPr b="1"/>
-              <a:t>Reproducibility</a:t>
-            </a:r>
-            <a:r>
-              <a:rPr/>
-              <a:t> — numbers and figures are </a:t>
-            </a:r>
-            <a:r>
-              <a:rPr i="1"/>
-              <a:t>computed</a:t>
-            </a:r>
-            <a:r>
-              <a:rPr/>
-              <a:t>, never copied by hand; change the data, press </a:t>
-            </a:r>
-            <a:r>
-              <a:rPr b="1"/>
-              <a:t>Render</a:t>
-            </a:r>
-          </a:p>
-          <a:p>
-            <a:pPr lvl="0"/>
-            <a:r>
-              <a:rPr b="1"/>
-              <a:t>Inline code</a:t>
-            </a:r>
-            <a:r>
-              <a:rPr/>
-              <a:t> — drop a live result straight into a sentence with </a:t>
-            </a:r>
-            <a:r>
-              <a:rPr>
-                <a:latin typeface="Courier"/>
-              </a:rPr>
-              <a:t>`r `</a:t>
-            </a:r>
-          </a:p>
-          <a:p>
-            <a:pPr lvl="0"/>
-            <a:r>
-              <a:rPr b="1"/>
-              <a:t>Word reports</a:t>
-            </a:r>
-            <a:r>
-              <a:rPr/>
-              <a:t> — </a:t>
-            </a:r>
-            <a:r>
-              <a:rPr>
-                <a:latin typeface="Courier"/>
-              </a:rPr>
-              <a:t>format: docx</a:t>
-            </a:r>
-            <a:r>
-              <a:rPr/>
-              <a:t> with </a:t>
-            </a:r>
-            <a:r>
-              <a:rPr>
-                <a:latin typeface="Courier"/>
-              </a:rPr>
-              <a:t>toc</a:t>
-            </a:r>
-            <a:r>
-              <a:rPr/>
-              <a:t> and </a:t>
-            </a:r>
-            <a:r>
-              <a:rPr>
-                <a:latin typeface="Courier"/>
-              </a:rPr>
-              <a:t>number-sections</a:t>
-            </a:r>
-            <a:r>
-              <a:rPr/>
-              <a:t> gives a professional document</a:t>
-            </a:r>
-          </a:p>
-          <a:p>
-            <a:pPr lvl="0"/>
-            <a:r>
-              <a:rPr b="1"/>
-              <a:t>Carried forward (Lecture 04)</a:t>
-            </a:r>
-            <a:r>
-              <a:rPr/>
-              <a:t> — shady leaves were significantly </a:t>
-            </a:r>
-            <a:r>
-              <a:rPr i="1"/>
-              <a:t>heavier</a:t>
-            </a:r>
-            <a:r>
-              <a:rPr/>
-              <a:t> than sunny leaves (Welch’s t-test, </a:t>
-            </a:r>
-            <a:r>
-              <a:rPr i="1"/>
-              <a:t>p</a:t>
-            </a:r>
-            <a:r>
-              <a:rPr/>
-              <a:t> &lt; 0.001)</a:t>
-            </a:r>
-          </a:p>
+              <a:t>The fix — match the model’s variable name exactly:</a:t>
+            </a:r>
+          </a:p>
+          <a:p>
+            <a:pPr lvl="0" indent="0">
+              <a:buNone/>
+            </a:pPr>
+            <a:r>
+              <a:rPr>
+                <a:solidFill>
+                  <a:srgbClr val="003B4F"/>
+                </a:solidFill>
+                <a:latin typeface="Courier"/>
+              </a:rPr>
+              <a:t>new &lt;- </a:t>
+            </a:r>
+            <a:r>
+              <a:rPr>
+                <a:solidFill>
+                  <a:srgbClr val="4758AB"/>
+                </a:solidFill>
+                <a:latin typeface="Courier"/>
+              </a:rPr>
+              <a:t>tibble</a:t>
+            </a:r>
+            <a:r>
+              <a:rPr>
+                <a:solidFill>
+                  <a:srgbClr val="003B4F"/>
+                </a:solidFill>
+                <a:latin typeface="Courier"/>
+              </a:rPr>
+              <a:t>(</a:t>
+            </a:r>
+            <a:r>
+              <a:rPr>
+                <a:solidFill>
+                  <a:srgbClr val="657422"/>
+                </a:solidFill>
+                <a:latin typeface="Courier"/>
+              </a:rPr>
+              <a:t>mass_g =</a:t>
+            </a:r>
+            <a:r>
+              <a:rPr>
+                <a:solidFill>
+                  <a:srgbClr val="003B4F"/>
+                </a:solidFill>
+                <a:latin typeface="Courier"/>
+              </a:rPr>
+              <a:t> </a:t>
+            </a:r>
+            <a:r>
+              <a:rPr>
+                <a:solidFill>
+                  <a:srgbClr val="AD0000"/>
+                </a:solidFill>
+                <a:latin typeface="Courier"/>
+              </a:rPr>
+              <a:t>0.092</a:t>
+            </a:r>
+            <a:r>
+              <a:rPr>
+                <a:solidFill>
+                  <a:srgbClr val="003B4F"/>
+                </a:solidFill>
+                <a:latin typeface="Courier"/>
+              </a:rPr>
+              <a:t>)</a:t>
+            </a:r>
+            <a:br/>
+            <a:r>
+              <a:rPr>
+                <a:solidFill>
+                  <a:srgbClr val="4758AB"/>
+                </a:solidFill>
+                <a:latin typeface="Courier"/>
+              </a:rPr>
+              <a:t>predict</a:t>
+            </a:r>
+            <a:r>
+              <a:rPr>
+                <a:solidFill>
+                  <a:srgbClr val="003B4F"/>
+                </a:solidFill>
+                <a:latin typeface="Courier"/>
+              </a:rPr>
+              <a:t>(paper_lm_model, </a:t>
+            </a:r>
+            <a:r>
+              <a:rPr>
+                <a:solidFill>
+                  <a:srgbClr val="657422"/>
+                </a:solidFill>
+                <a:latin typeface="Courier"/>
+              </a:rPr>
+              <a:t>newdata =</a:t>
+            </a:r>
+            <a:r>
+              <a:rPr>
+                <a:solidFill>
+                  <a:srgbClr val="003B4F"/>
+                </a:solidFill>
+                <a:latin typeface="Courier"/>
+              </a:rPr>
+              <a:t> new)</a:t>
+            </a:r>
+          </a:p>
+        </p:txBody>
+      </p:sp>
+      <p:sp>
+        <p:nvSpPr>
+          <p:cNvPr id="4" name="Content Placeholder 3"/>
+          <p:cNvSpPr>
+            <a:spLocks noGrp="1"/>
+          </p:cNvSpPr>
+          <p:nvPr>
+            <p:ph idx="2" sz="half"/>
+          </p:nvPr>
+        </p:nvSpPr>
+        <p:spPr/>
+        <p:txBody>
+          <a:bodyPr/>
+          <a:lstStyle/>
           <a:p>
             <a:pPr lvl="0" indent="0" marL="1270000">
               <a:buNone/>
             </a:pPr>
             <a:r>
               <a:rPr sz="2000" b="1"/>
-              <a:t>Note</a:t>
+              <a:t>Tip</a:t>
             </a:r>
           </a:p>
           <a:p>
@@ -11227,7 +13912,7 @@
             </a:pPr>
             <a:r>
               <a:rPr sz="2000" b="1"/>
-              <a:t>✅ Transition</a:t>
+              <a:t>✅ Why show a broken run?</a:t>
             </a:r>
           </a:p>
           <a:p>
@@ -11235,50 +13920,42 @@
               <a:buNone/>
             </a:pPr>
             <a:r>
+              <a:rPr sz="2000">
+                <a:latin typeface="Courier"/>
+              </a:rPr>
+              <a:t>predict()</a:t>
+            </a:r>
+            <a:r>
               <a:rPr sz="2000"/>
-              <a:t>You can now build a reproducible report. Today’s analysis — a </a:t>
-            </a:r>
-            <a:r>
-              <a:rPr sz="2000" b="1"/>
-              <a:t>calibration curve</a:t>
+              <a:t> looks for the same column names the model was built on. </a:t>
+            </a:r>
+            <a:r>
+              <a:rPr sz="2000" i="1"/>
+              <a:t>“object ‘mass_g’ not found”</a:t>
             </a:r>
             <a:r>
               <a:rPr sz="2000"/>
-              <a:t> that converts leaf weight into a more meaningful measurement, </a:t>
-            </a:r>
-            <a:r>
-              <a:rPr sz="2000" b="1"/>
-              <a:t>leaf surface area</a:t>
+              <a:t> means your </a:t>
+            </a:r>
+            <a:r>
+              <a:rPr sz="2000">
+                <a:latin typeface="Courier"/>
+              </a:rPr>
+              <a:t>newdata</a:t>
             </a:r>
             <a:r>
               <a:rPr sz="2000"/>
-              <a:t> (cm²) — is the perfect thing to write up in one. The activity gives you this same analysis as </a:t>
-            </a:r>
-            <a:r>
-              <a:rPr sz="2000" i="1"/>
-              <a:t>both</a:t>
+              <a:t> is missing that column — almost always a typo. This is the #1 </a:t>
+            </a:r>
+            <a:r>
+              <a:rPr sz="2000">
+                <a:latin typeface="Courier"/>
+              </a:rPr>
+              <a:t>predict()</a:t>
             </a:r>
             <a:r>
               <a:rPr sz="2000"/>
-              <a:t> a plain </a:t>
-            </a:r>
-            <a:r>
-              <a:rPr sz="2000">
-                <a:latin typeface="Courier"/>
-              </a:rPr>
-              <a:t>.R</a:t>
-            </a:r>
-            <a:r>
-              <a:rPr sz="2000"/>
-              <a:t> script </a:t>
-            </a:r>
-            <a:r>
-              <a:rPr sz="2000" b="1"/>
-              <a:t>and</a:t>
-            </a:r>
-            <a:r>
-              <a:rPr sz="2000"/>
-              <a:t> a Quarto report, so you can feel the difference.</a:t>
+              <a:t> mistake.</a:t>
             </a:r>
           </a:p>
         </p:txBody>
@@ -11288,7 +13965,7 @@
 </p:sld>
 </file>
 
-<file path=ppt/slides/slide20.xml><?xml version="1.0" encoding="utf-8"?>
+<file path=ppt/slides/slide33.xml><?xml version="1.0" encoding="utf-8"?>
 <p:sld xmlns:a="http://schemas.openxmlformats.org/drawingml/2006/main" xmlns:r="http://schemas.openxmlformats.org/officeDocument/2006/relationships" xmlns:p="http://schemas.openxmlformats.org/presentationml/2006/main">
   <p:cSld>
     <p:spTree>
@@ -12043,7 +14720,7 @@
 </p:sld>
 </file>
 
-<file path=ppt/slides/slide21.xml><?xml version="1.0" encoding="utf-8"?>
+<file path=ppt/slides/slide34.xml><?xml version="1.0" encoding="utf-8"?>
 <p:sld xmlns:a="http://schemas.openxmlformats.org/drawingml/2006/main" xmlns:r="http://schemas.openxmlformats.org/officeDocument/2006/relationships" xmlns:p="http://schemas.openxmlformats.org/presentationml/2006/main">
   <p:cSld>
     <p:spTree>
@@ -13464,7 +16141,84 @@
 </p:sld>
 </file>
 
-<file path=ppt/slides/slide22.xml><?xml version="1.0" encoding="utf-8"?>
+<file path=ppt/slides/slide35.xml><?xml version="1.0" encoding="utf-8"?>
+<p:sld xmlns:a="http://schemas.openxmlformats.org/drawingml/2006/main" xmlns:r="http://schemas.openxmlformats.org/officeDocument/2006/relationships" xmlns:p="http://schemas.openxmlformats.org/presentationml/2006/main">
+  <p:cSld>
+    <p:spTree>
+      <p:nvGrpSpPr>
+        <p:cNvPr id="1" name=""/>
+        <p:cNvGrpSpPr/>
+        <p:nvPr/>
+      </p:nvGrpSpPr>
+      <p:grpSpPr>
+        <a:xfrm>
+          <a:off x="0" y="0"/>
+          <a:ext cx="0" cy="0"/>
+          <a:chOff x="0" y="0"/>
+          <a:chExt cx="0" cy="0"/>
+        </a:xfrm>
+      </p:grpSpPr>
+      <p:sp>
+        <p:nvSpPr>
+          <p:cNvPr id="2" name="Title 1"/>
+          <p:cNvSpPr>
+            <a:spLocks noGrp="1"/>
+          </p:cNvSpPr>
+          <p:nvPr>
+            <p:ph type="title"/>
+          </p:nvPr>
+        </p:nvSpPr>
+        <p:spPr>
+          <a:xfrm>
+            <a:off x="0" y="0"/>
+            <a:ext cx="9144000" cy="582780"/>
+          </a:xfrm>
+        </p:spPr>
+        <p:txBody>
+          <a:bodyPr/>
+          <a:lstStyle/>
+          <a:p>
+            <a:pPr lvl="0" indent="0" marL="0">
+              <a:buNone/>
+            </a:pPr>
+            <a:r>
+              <a:rPr/>
+              <a:t>🛑 Pause — Do Activity Parts 11–12 Now</a:t>
+            </a:r>
+          </a:p>
+        </p:txBody>
+      </p:sp>
+      <p:sp>
+        <p:nvSpPr>
+          <p:cNvPr id="3" name="Content Placeholder 2"/>
+          <p:cNvSpPr>
+            <a:spLocks noGrp="1"/>
+          </p:cNvSpPr>
+          <p:nvPr>
+            <p:ph idx="1"/>
+          </p:nvPr>
+        </p:nvSpPr>
+        <p:spPr/>
+        <p:txBody>
+          <a:bodyPr/>
+          <a:lstStyle/>
+          <a:p>
+            <a:pPr lvl="0" indent="0" marL="0">
+              <a:buNone/>
+            </a:pPr>
+            <a:r>
+              <a:rPr/>
+              <a:t>Predict leaf area from tracing mass, compare confidence vs prediction intervals, and write your results paragraph. Predict the numbers before they print.</a:t>
+            </a:r>
+          </a:p>
+        </p:txBody>
+      </p:sp>
+    </p:spTree>
+  </p:cSld>
+</p:sld>
+</file>
+
+<file path=ppt/slides/slide36.xml><?xml version="1.0" encoding="utf-8"?>
 <p:sld xmlns:a="http://schemas.openxmlformats.org/drawingml/2006/main" xmlns:r="http://schemas.openxmlformats.org/officeDocument/2006/relationships" xmlns:p="http://schemas.openxmlformats.org/presentationml/2006/main">
   <p:cSld>
     <p:spTree>
@@ -13886,7 +16640,7 @@
 </p:sld>
 </file>
 
-<file path=ppt/slides/slide3.xml><?xml version="1.0" encoding="utf-8"?>
+<file path=ppt/slides/slide4.xml><?xml version="1.0" encoding="utf-8"?>
 <p:sld xmlns:a="http://schemas.openxmlformats.org/drawingml/2006/main" xmlns:r="http://schemas.openxmlformats.org/officeDocument/2006/relationships" xmlns:p="http://schemas.openxmlformats.org/presentationml/2006/main">
   <p:cSld>
     <p:spTree>
@@ -13931,7 +16685,223 @@
             </a:pPr>
             <a:r>
               <a:rPr/>
-              <a:t>Goals for Today</a:t>
+              <a:t>How to Use These Slides — Predict · Type · Run</a:t>
+            </a:r>
+          </a:p>
+        </p:txBody>
+      </p:sp>
+      <p:sp>
+        <p:nvSpPr>
+          <p:cNvPr id="3" name="Content Placeholder 2"/>
+          <p:cNvSpPr>
+            <a:spLocks noGrp="1"/>
+          </p:cNvSpPr>
+          <p:nvPr>
+            <p:ph idx="1" sz="half"/>
+          </p:nvPr>
+        </p:nvSpPr>
+        <p:spPr/>
+        <p:txBody>
+          <a:bodyPr/>
+          <a:lstStyle/>
+          <a:p>
+            <a:pPr lvl="0" indent="0" marL="0">
+              <a:buNone/>
+            </a:pPr>
+            <a:r>
+              <a:rPr/>
+              <a:t>This lecture runs in </a:t>
+            </a:r>
+            <a:r>
+              <a:rPr b="1"/>
+              <a:t>four short chunks</a:t>
+            </a:r>
+            <a:r>
+              <a:rPr/>
+              <a:t>. After each chunk you switch to the </a:t>
+            </a:r>
+            <a:r>
+              <a:rPr b="1"/>
+              <a:t>activity</a:t>
+            </a:r>
+            <a:r>
+              <a:rPr/>
+              <a:t> and type the code yourself.</a:t>
+            </a:r>
+          </a:p>
+          <a:p>
+            <a:pPr lvl="0" indent="0" marL="0">
+              <a:buNone/>
+            </a:pPr>
+            <a:r>
+              <a:rPr b="1"/>
+              <a:t>For every code block, do three things:</a:t>
+            </a:r>
+          </a:p>
+          <a:p>
+            <a:pPr lvl="0" indent="-342900" marL="342900">
+              <a:buAutoNum type="arabicPeriod"/>
+            </a:pPr>
+            <a:r>
+              <a:rPr b="1"/>
+              <a:t>Predict</a:t>
+            </a:r>
+            <a:r>
+              <a:rPr/>
+              <a:t> — before it runs, say what you think the output will be</a:t>
+            </a:r>
+          </a:p>
+          <a:p>
+            <a:pPr lvl="0" indent="-342900" marL="342900">
+              <a:buAutoNum type="arabicPeriod"/>
+            </a:pPr>
+            <a:r>
+              <a:rPr b="1"/>
+              <a:t>Type</a:t>
+            </a:r>
+            <a:r>
+              <a:rPr/>
+              <a:t> it out by hand — do not copy-paste</a:t>
+            </a:r>
+          </a:p>
+          <a:p>
+            <a:pPr lvl="0" indent="-342900" marL="342900">
+              <a:buAutoNum type="arabicPeriod"/>
+            </a:pPr>
+            <a:r>
+              <a:rPr b="1"/>
+              <a:t>Run</a:t>
+            </a:r>
+            <a:r>
+              <a:rPr/>
+              <a:t> it and compare to your prediction</a:t>
+            </a:r>
+          </a:p>
+        </p:txBody>
+      </p:sp>
+      <p:sp>
+        <p:nvSpPr>
+          <p:cNvPr id="4" name="Content Placeholder 3"/>
+          <p:cNvSpPr>
+            <a:spLocks noGrp="1"/>
+          </p:cNvSpPr>
+          <p:nvPr>
+            <p:ph idx="2" sz="half"/>
+          </p:nvPr>
+        </p:nvSpPr>
+        <p:spPr/>
+        <p:txBody>
+          <a:bodyPr/>
+          <a:lstStyle/>
+          <a:p>
+            <a:pPr lvl="0" indent="0" marL="1270000">
+              <a:buNone/>
+            </a:pPr>
+            <a:r>
+              <a:rPr sz="2000" b="1"/>
+              <a:t>Note</a:t>
+            </a:r>
+          </a:p>
+          <a:p>
+            <a:pPr lvl="0" indent="0" marL="1270000">
+              <a:buNone/>
+            </a:pPr>
+            <a:r>
+              <a:rPr sz="2000" b="1"/>
+              <a:t>✅ Why bother? (the evidence)</a:t>
+            </a:r>
+          </a:p>
+          <a:p>
+            <a:pPr lvl="0"/>
+            <a:r>
+              <a:rPr sz="2000" b="1"/>
+              <a:t>Predicting first</a:t>
+            </a:r>
+            <a:r>
+              <a:rPr sz="2000"/>
+              <a:t> forces your brain to </a:t>
+            </a:r>
+            <a:r>
+              <a:rPr sz="2000" i="1"/>
+              <a:t>retrieve</a:t>
+            </a:r>
+            <a:r>
+              <a:rPr sz="2000"/>
+              <a:t> what it knows — the gap between guess and answer is what makes it stick.</a:t>
+            </a:r>
+          </a:p>
+          <a:p>
+            <a:pPr lvl="0"/>
+            <a:r>
+              <a:rPr sz="2000" b="1"/>
+              <a:t>Typing by hand</a:t>
+            </a:r>
+            <a:r>
+              <a:rPr sz="2000"/>
+              <a:t> builds the finger-memory and error-spotting that copy-paste skips.</a:t>
+            </a:r>
+          </a:p>
+          <a:p>
+            <a:pPr lvl="0"/>
+            <a:r>
+              <a:rPr sz="2000" b="1"/>
+              <a:t>Chunk → immediate practice</a:t>
+            </a:r>
+            <a:r>
+              <a:rPr sz="2000"/>
+              <a:t> keeps a new idea in working memory long enough to form a lasting schema.</a:t>
+            </a:r>
+          </a:p>
+        </p:txBody>
+      </p:sp>
+    </p:spTree>
+  </p:cSld>
+</p:sld>
+</file>
+
+<file path=ppt/slides/slide5.xml><?xml version="1.0" encoding="utf-8"?>
+<p:sld xmlns:a="http://schemas.openxmlformats.org/drawingml/2006/main" xmlns:r="http://schemas.openxmlformats.org/officeDocument/2006/relationships" xmlns:p="http://schemas.openxmlformats.org/presentationml/2006/main">
+  <p:cSld>
+    <p:spTree>
+      <p:nvGrpSpPr>
+        <p:cNvPr id="1" name=""/>
+        <p:cNvGrpSpPr/>
+        <p:nvPr/>
+      </p:nvGrpSpPr>
+      <p:grpSpPr>
+        <a:xfrm>
+          <a:off x="0" y="0"/>
+          <a:ext cx="0" cy="0"/>
+          <a:chOff x="0" y="0"/>
+          <a:chExt cx="0" cy="0"/>
+        </a:xfrm>
+      </p:grpSpPr>
+      <p:sp>
+        <p:nvSpPr>
+          <p:cNvPr id="2" name="Title 1"/>
+          <p:cNvSpPr>
+            <a:spLocks noGrp="1"/>
+          </p:cNvSpPr>
+          <p:nvPr>
+            <p:ph type="title"/>
+          </p:nvPr>
+        </p:nvSpPr>
+        <p:spPr>
+          <a:xfrm>
+            <a:off x="0" y="0"/>
+            <a:ext cx="9144000" cy="582780"/>
+          </a:xfrm>
+        </p:spPr>
+        <p:txBody>
+          <a:bodyPr/>
+          <a:lstStyle/>
+          <a:p>
+            <a:pPr lvl="0" indent="0" marL="0">
+              <a:buNone/>
+            </a:pPr>
+            <a:r>
+              <a:rPr/>
+              <a:t>🧩 Chunk 1 of 4 · What Regression Is</a:t>
             </a:r>
           </a:p>
         </p:txBody>
@@ -13945,7 +16915,7 @@
                 <a:spLocks noGrp="1"/>
               </p:cNvSpPr>
               <p:nvPr>
-                <p:ph idx="1" sz="half"/>
+                <p:ph idx="1"/>
               </p:nvPr>
             </p:nvSpPr>
             <p:spPr/>
@@ -13953,17 +16923,16 @@
               <a:bodyPr/>
               <a:lstStyle/>
               <a:p>
-                <a:pPr lvl="0"/>
+                <a:pPr lvl="0" indent="0" marL="0">
+                  <a:buNone/>
+                </a:pPr>
+                <a:r>
+                  <a:rPr b="1"/>
+                  <a:t>We will cover:</a:t>
+                </a:r>
                 <a:r>
                   <a:rPr/>
-                  <a:t>Understand what linear regression does and when to use it</a:t>
-                </a:r>
-              </a:p>
-              <a:p>
-                <a:pPr lvl="0"/>
-                <a:r>
-                  <a:rPr/>
-                  <a:t>Learn the equation: </a:t>
+                  <a:t> the calibration idea, the equation </a:t>
                 </a:r>
                 <a14:m>
                   <m:oMath xmlns:m="http://schemas.openxmlformats.org/officeDocument/2006/math">
@@ -14000,118 +16969,9 @@
                     </m:r>
                   </m:oMath>
                 </a14:m>
-              </a:p>
-              <a:p>
-                <a:pPr lvl="1"/>
                 <a:r>
                   <a:rPr/>
-                  <a:t>slope </a:t>
-                </a:r>
-                <a:r>
-                  <a:rPr i="1"/>
-                  <a:t>b</a:t>
-                </a:r>
-                <a:r>
-                  <a:rPr/>
-                  <a:t>, intercept </a:t>
-                </a:r>
-                <a:r>
-                  <a:rPr i="1"/>
-                  <a:t>a</a:t>
-                </a:r>
-                <a:r>
-                  <a:rPr/>
-                  <a:t>, residuals, R²</a:t>
-                </a:r>
-              </a:p>
-              <a:p>
-                <a:pPr lvl="0"/>
-                <a:r>
-                  <a:rPr/>
-                  <a:t>Understand </a:t>
-                </a:r>
-                <a:r>
-                  <a:rPr b="1"/>
-                  <a:t>least squares</a:t>
-                </a:r>
-                <a:r>
-                  <a:rPr/>
-                  <a:t> — what the line minimizes</a:t>
-                </a:r>
-              </a:p>
-              <a:p>
-                <a:pPr lvl="0"/>
-                <a:r>
-                  <a:rPr/>
-                  <a:t>Fit a model in R with </a:t>
-                </a:r>
-                <a:r>
-                  <a:rPr>
-                    <a:latin typeface="Courier"/>
-                  </a:rPr>
-                  <a:t>lm()</a:t>
-                </a:r>
-                <a:r>
-                  <a:rPr/>
-                  <a:t> and read every line of </a:t>
-                </a:r>
-                <a:r>
-                  <a:rPr>
-                    <a:latin typeface="Courier"/>
-                  </a:rPr>
-                  <a:t>summary()</a:t>
-                </a:r>
-              </a:p>
-              <a:p>
-                <a:pPr lvl="0"/>
-                <a:r>
-                  <a:rPr b="1"/>
-                  <a:t>Apply it:</a:t>
-                </a:r>
-                <a:r>
-                  <a:rPr/>
-                  <a:t> build a calibration curve to predict leaf area from paper tracing mass</a:t>
-                </a:r>
-              </a:p>
-              <a:p>
-                <a:pPr lvl="0"/>
-                <a:r>
-                  <a:rPr/>
-                  <a:t>Check all four assumptions of regression</a:t>
-                </a:r>
-              </a:p>
-              <a:p>
-                <a:pPr lvl="0"/>
-                <a:r>
-                  <a:rPr/>
-                  <a:t>Use </a:t>
-                </a:r>
-                <a:r>
-                  <a:rPr>
-                    <a:latin typeface="Courier"/>
-                  </a:rPr>
-                  <a:t>predict()</a:t>
-                </a:r>
-                <a:r>
-                  <a:rPr/>
-                  <a:t> to make predictions with intervals</a:t>
-                </a:r>
-              </a:p>
-              <a:p>
-                <a:pPr lvl="0"/>
-                <a:r>
-                  <a:rPr/>
-                  <a:t>Use </a:t>
-                </a:r>
-                <a:r>
-                  <a:rPr>
-                    <a:latin typeface="Courier"/>
-                  </a:rPr>
-                  <a:t>mutate()</a:t>
-                </a:r>
-                <a:r>
-                  <a:rPr/>
-                  <a:t> to add model results to a data frame</a:t>
+                  <a:t>, least squares, R², and the four assumptions.</a:t>
                 </a:r>
               </a:p>
               <a:p>
@@ -14129,170 +16989,23 @@
                 </a:pPr>
                 <a:r>
                   <a:rPr sz="2000" b="1"/>
-                  <a:t>🖐 Try it yourself</a:t>
+                  <a:t>🖐 After this chunk: Activity Parts 1–3</a:t>
                 </a:r>
-              </a:p>
-              <a:p>
-                <a:pPr lvl="0" indent="0" marL="1270000">
-                  <a:buNone/>
-                </a:pPr>
                 <a:r>
                   <a:rPr sz="2000"/>
-                  <a:t>By the end you will predict leaf area from a tracing weight.</a:t>
+                  <a:t> (load, inspect, and scatter-plot the paper data).</a:t>
                 </a:r>
               </a:p>
             </p:txBody>
           </p:sp>
         </mc:Choice>
       </mc:AlternateContent>
-      <p:sp>
-        <p:nvSpPr>
-          <p:cNvPr id="4" name="Content Placeholder 3"/>
-          <p:cNvSpPr>
-            <a:spLocks noGrp="1"/>
-          </p:cNvSpPr>
-          <p:nvPr>
-            <p:ph idx="2" sz="half"/>
-          </p:nvPr>
-        </p:nvSpPr>
-        <p:spPr/>
-        <p:txBody>
-          <a:bodyPr/>
-          <a:lstStyle/>
-          <a:p>
-            <a:pPr lvl="0" indent="0" marL="0">
-              <a:buNone/>
-            </a:pPr>
-            <a:r>
-              <a:rPr b="1"/>
-              <a:t>Tools today:</a:t>
-            </a:r>
-          </a:p>
-          <a:p>
-            <a:pPr lvl="0"/>
-            <a:r>
-              <a:rPr>
-                <a:latin typeface="Courier"/>
-              </a:rPr>
-              <a:t>readxl</a:t>
-            </a:r>
-            <a:r>
-              <a:rPr/>
-              <a:t>, </a:t>
-            </a:r>
-            <a:r>
-              <a:rPr>
-                <a:latin typeface="Courier"/>
-              </a:rPr>
-              <a:t>tidyverse</a:t>
-            </a:r>
-          </a:p>
-          <a:p>
-            <a:pPr lvl="0" indent="0" marL="0">
-              <a:buNone/>
-            </a:pPr>
-            <a:r>
-              <a:rPr b="1"/>
-              <a:t>Textbook:</a:t>
-            </a:r>
-          </a:p>
-          <a:p>
-            <a:pPr lvl="0"/>
-            <a:r>
-              <a:rPr/>
-              <a:t>📖 Whitlock &amp; Schluter </a:t>
-            </a:r>
-            <a:r>
-              <a:rPr i="1"/>
-              <a:t>Analysis of Biological Data</a:t>
-            </a:r>
-            <a:r>
-              <a:rPr/>
-              <a:t> 2nd ed.</a:t>
-            </a:r>
-          </a:p>
-          <a:p>
-            <a:pPr lvl="0"/>
-            <a:r>
-              <a:rPr b="1"/>
-              <a:t>Chapter 17 — Regression</a:t>
-            </a:r>
-            <a:r>
-              <a:rPr/>
-              <a:t> (pp. 539–575)</a:t>
-            </a:r>
-          </a:p>
-          <a:p>
-            <a:pPr lvl="1"/>
-            <a:r>
-              <a:rPr/>
-              <a:t>§17.1 Linear regression</a:t>
-            </a:r>
-          </a:p>
-          <a:p>
-            <a:pPr lvl="1"/>
-            <a:r>
-              <a:rPr/>
-              <a:t>§17.3 Testing slope hypotheses</a:t>
-            </a:r>
-          </a:p>
-          <a:p>
-            <a:pPr lvl="1"/>
-            <a:r>
-              <a:rPr/>
-              <a:t>§17.4 R²</a:t>
-            </a:r>
-          </a:p>
-          <a:p>
-            <a:pPr lvl="1"/>
-            <a:r>
-              <a:rPr/>
-              <a:t>§17.5 Assumptions</a:t>
-            </a:r>
-          </a:p>
-          <a:p>
-            <a:pPr lvl="0" indent="0" marL="0">
-              <a:buNone/>
-            </a:pPr>
-            <a:r>
-              <a:rPr b="1"/>
-              <a:t>Naming conventions:</a:t>
-            </a:r>
-          </a:p>
-          <a:p>
-            <a:pPr lvl="0"/>
-            <a:r>
-              <a:rPr/>
-              <a:t>models → </a:t>
-            </a:r>
-            <a:r>
-              <a:rPr>
-                <a:latin typeface="Courier"/>
-              </a:rPr>
-              <a:t>_model</a:t>
-            </a:r>
-          </a:p>
-          <a:p>
-            <a:pPr lvl="0"/>
-            <a:r>
-              <a:rPr/>
-              <a:t>plots → </a:t>
-            </a:r>
-            <a:r>
-              <a:rPr>
-                <a:latin typeface="Courier"/>
-              </a:rPr>
-              <a:t>_plot</a:t>
-            </a:r>
-          </a:p>
-        </p:txBody>
-      </p:sp>
     </p:spTree>
   </p:cSld>
 </p:sld>
 </file>
 
-<file path=ppt/slides/slide4.xml><?xml version="1.0" encoding="utf-8"?>
+<file path=ppt/slides/slide6.xml><?xml version="1.0" encoding="utf-8"?>
 <p:sld xmlns:a="http://schemas.openxmlformats.org/drawingml/2006/main" xmlns:r="http://schemas.openxmlformats.org/officeDocument/2006/relationships" xmlns:p="http://schemas.openxmlformats.org/presentationml/2006/main">
   <p:cSld>
     <p:spTree>
@@ -14782,7 +17495,7 @@
 </p:sld>
 </file>
 
-<file path=ppt/slides/slide5.xml><?xml version="1.0" encoding="utf-8"?>
+<file path=ppt/slides/slide7.xml><?xml version="1.0" encoding="utf-8"?>
 <p:sld xmlns:a="http://schemas.openxmlformats.org/drawingml/2006/main" xmlns:r="http://schemas.openxmlformats.org/officeDocument/2006/relationships" xmlns:p="http://schemas.openxmlformats.org/presentationml/2006/main">
   <p:cSld>
     <p:spTree>
@@ -15349,10 +18062,10 @@
 </p:sld>
 </file>
 
-<file path=ppt/slides/slide6.xml><?xml version="1.0" encoding="UTF-8"?><p:sld xmlns:a="http://schemas.openxmlformats.org/drawingml/2006/main" xmlns:r="http://schemas.openxmlformats.org/officeDocument/2006/relationships" xmlns:p="http://schemas.openxmlformats.org/presentationml/2006/main"><p:cSld><p:spTree><p:nvGrpSpPr><p:cNvPr id="1" name="" /><p:cNvGrpSpPr /><p:nvPr /></p:nvGrpSpPr><p:grpSpPr><a:xfrm><a:off x="0" y="0" /><a:ext cx="0" cy="0" /><a:chOff x="0" y="0" /><a:chExt cx="0" cy="0" /></a:xfrm></p:grpSpPr><p:sp><p:nvSpPr><p:cNvPr id="2" name="Title 1" /><p:cNvSpPr><a:spLocks noGrp="1" /></p:cNvSpPr><p:nvPr><p:ph type="title" /></p:nvPr></p:nvSpPr><p:spPr><a:xfrm><a:off x="139485" y="78119" /><a:ext cx="8229600" cy="607682" /></a:xfrm></p:spPr><p:txBody><a:bodyPr /><a:lstStyle /><a:p><a:pPr lvl="0" indent="0" marL="0"><a:buNone /></a:pPr><a:r><a:rPr /><a:t>The Regression Equation</a:t></a:r></a:p></p:txBody></p:sp><mc:AlternateContent xmlns:mc="http://schemas.openxmlformats.org/markup-compatibility/2006"><mc:Choice xmlns:a14="http://schemas.microsoft.com/office/drawing/2010/main" Requires="a14"><p:sp><p:nvSpPr><p:cNvPr id="3" name="Text Placeholder 2" /><p:cNvSpPr><a:spLocks noGrp="1" /></p:cNvSpPr><p:nvPr><p:ph idx="1" type="body" /></p:nvPr></p:nvSpPr><p:spPr /><p:txBody><a:bodyPr /><a:lstStyle /><a:p><a:pPr lvl="0" indent="0" marL="0"><a:buNone /></a:pPr><a:r><a:rPr b="1" /><a:t>Population model</a:t></a:r><a:r><a:rPr /><a:t> (W&amp;S §17.1):</a:t></a:r></a:p><a:p><a:pPr lvl="0" indent="0" marL="0"><a:buNone /></a:pPr><a14:m><m:oMathPara xmlns:m="http://schemas.openxmlformats.org/officeDocument/2006/math"><m:oMathParaPr><m:jc m:val="center" /></m:oMathParaPr><m:oMath><m:r><m:t>Y</m:t></m:r><m:r><m:rPr><m:sty m:val="p" /></m:rPr><m:t>=</m:t></m:r><m:r><m:t>α</m:t></m:r><m:r><m:rPr><m:sty m:val="p" /></m:rPr><m:t>+</m:t></m:r><m:r><m:t>β</m:t></m:r><m:r><m:t>X</m:t></m:r><m:r><m:rPr><m:sty m:val="p" /></m:rPr><m:t>+</m:t></m:r><m:r><m:t>ε</m:t></m:r></m:oMath></m:oMathPara></a14:m></a:p><a:p><a:pPr lvl="0" indent="0" marL="0"><a:buNone /></a:pPr><a:r><a:rPr b="1" /><a:t>Sample estimate</a:t></a:r><a:r><a:rPr /><a:t> (what R calculates):</a:t></a:r></a:p><a:p><a:pPr lvl="0" indent="0" marL="0"><a:buNone /></a:pPr><a14:m><m:oMathPara xmlns:m="http://schemas.openxmlformats.org/officeDocument/2006/math"><m:oMathParaPr><m:jc m:val="center" /></m:oMathParaPr><m:oMath><m:acc><m:accPr><m:chr m:val="̂" /></m:accPr><m:e><m:r><m:t>Y</m:t></m:r></m:e></m:acc><m:r><m:rPr><m:sty m:val="p" /></m:rPr><m:t>=</m:t></m:r><m:r><m:t>a</m:t></m:r><m:r><m:rPr><m:sty m:val="p" /></m:rPr><m:t>+</m:t></m:r><m:r><m:t>b</m:t></m:r><m:r><m:t>X</m:t></m:r></m:oMath></m:oMathPara></a14:m></a:p></p:txBody></p:sp></mc:Choice></mc:AlternateContent><p:graphicFrame><p:nvGraphicFramePr><p:cNvPr id="6" name="Content Placeholder 5" /><p:cNvGraphicFramePr><a:graphicFrameLocks noGrp="1" /></p:cNvGraphicFramePr><p:nvPr><p:ph idx="1" /></p:nvPr></p:nvGraphicFramePr><p:xfrm><a:off x="127000" y="1270000" /><a:ext cx="4432300" cy="3302000" /></p:xfrm><a:graphic><a:graphicData uri="http://schemas.openxmlformats.org/drawingml/2006/table"><a:tbl><a:tblPr firstRow="1" bandRow="1"><a:tableStyleId>{5C22544A-7EE6-4342-B048-85BDC9FD1C3A}</a:tableStyleId></a:tblPr><a:tblGrid><a:gridCol w="1473200" /><a:gridCol w="1473200" /><a:gridCol w="1473200" /></a:tblGrid><a:tr h="0"><a:tc><a:txBody><a:bodyPr /><a:lstStyle /><a:p><a:pPr lvl="0" indent="0" marL="0"><a:buNone /></a:pPr><a:r><a:rPr /><a:t>Symbol</a:t></a:r></a:p></a:txBody><a:tcPr /></a:tc><a:tc><a:txBody><a:bodyPr /><a:lstStyle /><a:p><a:pPr lvl="0" indent="0" marL="0"><a:buNone /></a:pPr><a:r><a:rPr /><a:t>Name</a:t></a:r></a:p></a:txBody><a:tcPr /></a:tc><a:tc><a:txBody><a:bodyPr /><a:lstStyle /><a:p><a:pPr lvl="0" indent="0" marL="0"><a:buNone /></a:pPr><a:r><a:rPr /><a:t>Meaning</a:t></a:r></a:p></a:txBody><a:tcPr /></a:tc></a:tr><a:tr h="0"><a:tc><a:txBody><a:bodyPr /><a:lstStyle /><a:p><a:pPr lvl="0" indent="0" marL="0"><a:buNone /></a:pPr><a14:m><m:oMath xmlns:m="http://schemas.openxmlformats.org/officeDocument/2006/math"><m:acc><m:accPr><m:chr m:val="̂" /></m:accPr><m:e><m:r><m:t>Y</m:t></m:r></m:e></m:acc></m:oMath></a14:m></a:p></a:txBody></a:tc><a:tc><a:txBody><a:bodyPr /><a:lstStyle /><a:p><a:pPr lvl="0" indent="0" marL="0"><a:buNone /></a:pPr><a:r><a:rPr /><a:t>predicted Y</a:t></a:r></a:p></a:txBody></a:tc><a:tc><a:txBody><a:bodyPr /><a:lstStyle /><a:p><a:pPr lvl="0" indent="0" marL="0"><a:buNone /></a:pPr><a:r><a:rPr /><a:t>estimated mean area at a given mass</a:t></a:r></a:p></a:txBody></a:tc></a:tr><a:tr h="0"><a:tc><a:txBody><a:bodyPr /><a:lstStyle /><a:p><a:pPr lvl="0" indent="0" marL="0"><a:buNone /></a:pPr><a:r><a:rPr i="1" /><a:t>a</a:t></a:r></a:p></a:txBody></a:tc><a:tc><a:txBody><a:bodyPr /><a:lstStyle /><a:p><a:pPr lvl="0" indent="0" marL="0"><a:buNone /></a:pPr><a:r><a:rPr /><a:t>intercept</a:t></a:r></a:p></a:txBody></a:tc><a:tc><a:txBody><a:bodyPr /><a:lstStyle /><a:p><a:pPr lvl="0" indent="0" marL="0"><a:buNone /></a:pPr><a:r><a:rPr /><a:t>predicted Y when X = 0</a:t></a:r></a:p></a:txBody></a:tc></a:tr><a:tr h="0"><a:tc><a:txBody><a:bodyPr /><a:lstStyle /><a:p><a:pPr lvl="0" indent="0" marL="0"><a:buNone /></a:pPr><a:r><a:rPr i="1" /><a:t>b</a:t></a:r></a:p></a:txBody></a:tc><a:tc><a:txBody><a:bodyPr /><a:lstStyle /><a:p><a:pPr lvl="0" indent="0" marL="0"><a:buNone /></a:pPr><a:r><a:rPr /><a:t>slope</a:t></a:r></a:p></a:txBody></a:tc><a:tc><a:txBody><a:bodyPr /><a:lstStyle /><a:p><a:pPr lvl="0" indent="0" marL="0"><a:buNone /></a:pPr><a:r><a:rPr /><a:t>change in Y per 1-unit increase in X</a:t></a:r></a:p></a:txBody></a:tc></a:tr><a:tr h="0"><a:tc><a:txBody><a:bodyPr /><a:lstStyle /><a:p><a:pPr lvl="0" indent="0" marL="0"><a:buNone /></a:pPr><a14:m><m:oMath xmlns:m="http://schemas.openxmlformats.org/officeDocument/2006/math"><m:r><m:t>ε</m:t></m:r></m:oMath></a14:m></a:p></a:txBody></a:tc><a:tc><a:txBody><a:bodyPr /><a:lstStyle /><a:p><a:pPr lvl="0" indent="0" marL="0"><a:buNone /></a:pPr><a:r><a:rPr /><a:t>residual</a:t></a:r></a:p></a:txBody></a:tc><a:tc><a:txBody><a:bodyPr /><a:lstStyle /><a:p><a:pPr lvl="0" indent="0" marL="0"><a:buNone /></a:pPr><a:r><a:rPr /><a:t>observed − predicted</a:t></a:r></a:p></a:txBody></a:tc></a:tr></a:tbl></a:graphicData></a:graphic></p:graphicFrame><mc:AlternateContent xmlns:mc="http://schemas.openxmlformats.org/markup-compatibility/2006"><mc:Choice xmlns:a14="http://schemas.microsoft.com/office/drawing/2010/main" Requires="a14"><p:sp><p:nvSpPr><p:cNvPr id="4" name="Content Placeholder 3" /><p:cNvSpPr><a:spLocks noGrp="1" /></p:cNvSpPr><p:nvPr><p:ph idx="2" sz="half" /></p:nvPr></p:nvSpPr><p:spPr /><p:txBody><a:bodyPr /><a:lstStyle /><a:p><a:pPr lvl="0" indent="0" marL="0"><a:buNone /></a:pPr><a:r><a:rPr b="1" /><a:t>Our equation will be:</a:t></a:r></a:p><a:p><a:pPr lvl="0" indent="0" marL="0"><a:buNone /></a:pPr><a14:m><m:oMathPara xmlns:m="http://schemas.openxmlformats.org/officeDocument/2006/math"><m:oMathParaPr><m:jc m:val="center" /></m:oMathParaPr><m:oMath><m:acc><m:accPr><m:chr m:val="̂" /></m:accPr><m:e><m:r><m:rPr><m:nor /><m:sty m:val="p" /></m:rPr><m:t>area</m:t></m:r></m:e></m:acc><m:r><m:rPr><m:sty m:val="p" /></m:rPr><m:t>=</m:t></m:r><m:r><m:t>a</m:t></m:r><m:r><m:rPr><m:sty m:val="p" /></m:rPr><m:t>+</m:t></m:r><m:r><m:t>b</m:t></m:r><m:r><m:rPr><m:sty m:val="p" /></m:rPr><m:t>×</m:t></m:r><m:r><m:rPr><m:nor /><m:sty m:val="p" /></m:rPr><m:t>mass_g</m:t></m:r></m:oMath></m:oMathPara></a14:m></a:p></p:txBody></p:sp></mc:Choice></mc:AlternateContent><p:sp><p:nvSpPr><p:cNvPr id="5" name="Text Placeholder 4" /><p:cNvSpPr><a:spLocks noGrp="1" /></p:cNvSpPr><p:nvPr><p:ph idx="3" sz="quarter" type="body" /></p:nvPr></p:nvSpPr><p:spPr /><p:txBody><a:bodyPr /><a:lstStyle /><a:p><a:pPr lvl="0" indent="0" marL="0"><a:buNone /></a:pPr><a:r><a:rPr b="1" /><a:t>Interpreting the slope:</a:t></a:r></a:p><a:p><a:pPr lvl="0" indent="0" marL="1270000"><a:buNone /></a:pPr><a:r><a:rPr sz="2000" i="1" /><a:t>b</a:t></a:r><a:r><a:rPr sz="2000" /><a:t> = the change in area (cm²) for every additional 1 gram of paper</a:t></a:r></a:p><a:p><a:pPr lvl="0" indent="0" marL="0"><a:buNone /></a:pPr><a:r><a:rPr /><a:t>Since 1 g ≈ 130 cm² of paper, the slope is the </a:t></a:r><a:r><a:rPr b="1" /><a:t>area density</a:t></a:r><a:r><a:rPr /><a:t> of the paper stock.</a:t></a:r></a:p><a:p><a:pPr lvl="0" indent="0" marL="0"><a:buNone /></a:pPr><a:r><a:rPr b="1" /><a:t>Interpreting the intercept:</a:t></a:r></a:p><a:p><a:pPr lvl="0" indent="0" marL="1270000"><a:buNone /></a:pPr><a:r><a:rPr sz="2000" i="1" /><a:t>a</a:t></a:r><a:r><a:rPr sz="2000" /><a:t> = predicted area when mass = 0</a:t></a:r></a:p><a:p><a:pPr lvl="0" indent="0" marL="0"><a:buNone /></a:pPr><a:r><a:rPr /><a:t>Physically this should be 0 (no paper, no area). Small non-zero values reflect measurement error.</a:t></a:r></a:p><a:p><a:pPr lvl="0" indent="0" marL="0"><a:buNone /></a:pPr><a:r><a:rPr /><a:t>📖 W&amp;S §17.1 pp. 543–545</a:t></a:r></a:p></p:txBody></p:sp></p:spTree></p:cSld></p:sld>
+<file path=ppt/slides/slide8.xml><?xml version="1.0" encoding="UTF-8"?><p:sld xmlns:a="http://schemas.openxmlformats.org/drawingml/2006/main" xmlns:r="http://schemas.openxmlformats.org/officeDocument/2006/relationships" xmlns:p="http://schemas.openxmlformats.org/presentationml/2006/main"><p:cSld><p:spTree><p:nvGrpSpPr><p:cNvPr id="1" name="" /><p:cNvGrpSpPr /><p:nvPr /></p:nvGrpSpPr><p:grpSpPr><a:xfrm><a:off x="0" y="0" /><a:ext cx="0" cy="0" /><a:chOff x="0" y="0" /><a:chExt cx="0" cy="0" /></a:xfrm></p:grpSpPr><p:sp><p:nvSpPr><p:cNvPr id="2" name="Title 1" /><p:cNvSpPr><a:spLocks noGrp="1" /></p:cNvSpPr><p:nvPr><p:ph type="title" /></p:nvPr></p:nvSpPr><p:spPr><a:xfrm><a:off x="139485" y="78119" /><a:ext cx="8229600" cy="607682" /></a:xfrm></p:spPr><p:txBody><a:bodyPr /><a:lstStyle /><a:p><a:pPr lvl="0" indent="0" marL="0"><a:buNone /></a:pPr><a:r><a:rPr /><a:t>The Regression Equation</a:t></a:r></a:p></p:txBody></p:sp><mc:AlternateContent xmlns:mc="http://schemas.openxmlformats.org/markup-compatibility/2006"><mc:Choice xmlns:a14="http://schemas.microsoft.com/office/drawing/2010/main" Requires="a14"><p:sp><p:nvSpPr><p:cNvPr id="3" name="Text Placeholder 2" /><p:cNvSpPr><a:spLocks noGrp="1" /></p:cNvSpPr><p:nvPr><p:ph idx="1" type="body" /></p:nvPr></p:nvSpPr><p:spPr /><p:txBody><a:bodyPr /><a:lstStyle /><a:p><a:pPr lvl="0" indent="0" marL="0"><a:buNone /></a:pPr><a:r><a:rPr b="1" /><a:t>Population model</a:t></a:r><a:r><a:rPr /><a:t> (W&amp;S §17.1):</a:t></a:r></a:p><a:p><a:pPr lvl="0" indent="0" marL="0"><a:buNone /></a:pPr><a14:m><m:oMathPara xmlns:m="http://schemas.openxmlformats.org/officeDocument/2006/math"><m:oMathParaPr><m:jc m:val="center" /></m:oMathParaPr><m:oMath><m:r><m:t>Y</m:t></m:r><m:r><m:rPr><m:sty m:val="p" /></m:rPr><m:t>=</m:t></m:r><m:r><m:t>α</m:t></m:r><m:r><m:rPr><m:sty m:val="p" /></m:rPr><m:t>+</m:t></m:r><m:r><m:t>β</m:t></m:r><m:r><m:t>X</m:t></m:r><m:r><m:rPr><m:sty m:val="p" /></m:rPr><m:t>+</m:t></m:r><m:r><m:t>ε</m:t></m:r></m:oMath></m:oMathPara></a14:m></a:p><a:p><a:pPr lvl="0" indent="0" marL="0"><a:buNone /></a:pPr><a:r><a:rPr b="1" /><a:t>Sample estimate</a:t></a:r><a:r><a:rPr /><a:t> (what R calculates):</a:t></a:r></a:p><a:p><a:pPr lvl="0" indent="0" marL="0"><a:buNone /></a:pPr><a14:m><m:oMathPara xmlns:m="http://schemas.openxmlformats.org/officeDocument/2006/math"><m:oMathParaPr><m:jc m:val="center" /></m:oMathParaPr><m:oMath><m:acc><m:accPr><m:chr m:val="̂" /></m:accPr><m:e><m:r><m:t>Y</m:t></m:r></m:e></m:acc><m:r><m:rPr><m:sty m:val="p" /></m:rPr><m:t>=</m:t></m:r><m:r><m:t>a</m:t></m:r><m:r><m:rPr><m:sty m:val="p" /></m:rPr><m:t>+</m:t></m:r><m:r><m:t>b</m:t></m:r><m:r><m:t>X</m:t></m:r></m:oMath></m:oMathPara></a14:m></a:p></p:txBody></p:sp></mc:Choice></mc:AlternateContent><p:graphicFrame><p:nvGraphicFramePr><p:cNvPr id="6" name="Content Placeholder 5" /><p:cNvGraphicFramePr><a:graphicFrameLocks noGrp="1" /></p:cNvGraphicFramePr><p:nvPr><p:ph idx="1" /></p:nvPr></p:nvGraphicFramePr><p:xfrm><a:off x="127000" y="1270000" /><a:ext cx="4432300" cy="3302000" /></p:xfrm><a:graphic><a:graphicData uri="http://schemas.openxmlformats.org/drawingml/2006/table"><a:tbl><a:tblPr firstRow="1" bandRow="1"><a:tableStyleId>{5C22544A-7EE6-4342-B048-85BDC9FD1C3A}</a:tableStyleId></a:tblPr><a:tblGrid><a:gridCol w="1473200" /><a:gridCol w="1473200" /><a:gridCol w="1473200" /></a:tblGrid><a:tr h="0"><a:tc><a:txBody><a:bodyPr /><a:lstStyle /><a:p><a:pPr lvl="0" indent="0" marL="0"><a:buNone /></a:pPr><a:r><a:rPr /><a:t>Symbol</a:t></a:r></a:p></a:txBody><a:tcPr /></a:tc><a:tc><a:txBody><a:bodyPr /><a:lstStyle /><a:p><a:pPr lvl="0" indent="0" marL="0"><a:buNone /></a:pPr><a:r><a:rPr /><a:t>Name</a:t></a:r></a:p></a:txBody><a:tcPr /></a:tc><a:tc><a:txBody><a:bodyPr /><a:lstStyle /><a:p><a:pPr lvl="0" indent="0" marL="0"><a:buNone /></a:pPr><a:r><a:rPr /><a:t>Meaning</a:t></a:r></a:p></a:txBody><a:tcPr /></a:tc></a:tr><a:tr h="0"><a:tc><a:txBody><a:bodyPr /><a:lstStyle /><a:p><a:pPr lvl="0" indent="0" marL="0"><a:buNone /></a:pPr><a14:m><m:oMath xmlns:m="http://schemas.openxmlformats.org/officeDocument/2006/math"><m:acc><m:accPr><m:chr m:val="̂" /></m:accPr><m:e><m:r><m:t>Y</m:t></m:r></m:e></m:acc></m:oMath></a14:m></a:p></a:txBody></a:tc><a:tc><a:txBody><a:bodyPr /><a:lstStyle /><a:p><a:pPr lvl="0" indent="0" marL="0"><a:buNone /></a:pPr><a:r><a:rPr /><a:t>predicted Y</a:t></a:r></a:p></a:txBody></a:tc><a:tc><a:txBody><a:bodyPr /><a:lstStyle /><a:p><a:pPr lvl="0" indent="0" marL="0"><a:buNone /></a:pPr><a:r><a:rPr /><a:t>estimated mean area at a given mass</a:t></a:r></a:p></a:txBody></a:tc></a:tr><a:tr h="0"><a:tc><a:txBody><a:bodyPr /><a:lstStyle /><a:p><a:pPr lvl="0" indent="0" marL="0"><a:buNone /></a:pPr><a:r><a:rPr i="1" /><a:t>a</a:t></a:r></a:p></a:txBody></a:tc><a:tc><a:txBody><a:bodyPr /><a:lstStyle /><a:p><a:pPr lvl="0" indent="0" marL="0"><a:buNone /></a:pPr><a:r><a:rPr /><a:t>intercept</a:t></a:r></a:p></a:txBody></a:tc><a:tc><a:txBody><a:bodyPr /><a:lstStyle /><a:p><a:pPr lvl="0" indent="0" marL="0"><a:buNone /></a:pPr><a:r><a:rPr /><a:t>predicted Y when X = 0</a:t></a:r></a:p></a:txBody></a:tc></a:tr><a:tr h="0"><a:tc><a:txBody><a:bodyPr /><a:lstStyle /><a:p><a:pPr lvl="0" indent="0" marL="0"><a:buNone /></a:pPr><a:r><a:rPr i="1" /><a:t>b</a:t></a:r></a:p></a:txBody></a:tc><a:tc><a:txBody><a:bodyPr /><a:lstStyle /><a:p><a:pPr lvl="0" indent="0" marL="0"><a:buNone /></a:pPr><a:r><a:rPr /><a:t>slope</a:t></a:r></a:p></a:txBody></a:tc><a:tc><a:txBody><a:bodyPr /><a:lstStyle /><a:p><a:pPr lvl="0" indent="0" marL="0"><a:buNone /></a:pPr><a:r><a:rPr /><a:t>change in Y per 1-unit increase in X</a:t></a:r></a:p></a:txBody></a:tc></a:tr><a:tr h="0"><a:tc><a:txBody><a:bodyPr /><a:lstStyle /><a:p><a:pPr lvl="0" indent="0" marL="0"><a:buNone /></a:pPr><a14:m><m:oMath xmlns:m="http://schemas.openxmlformats.org/officeDocument/2006/math"><m:r><m:t>ε</m:t></m:r></m:oMath></a14:m></a:p></a:txBody></a:tc><a:tc><a:txBody><a:bodyPr /><a:lstStyle /><a:p><a:pPr lvl="0" indent="0" marL="0"><a:buNone /></a:pPr><a:r><a:rPr /><a:t>residual</a:t></a:r></a:p></a:txBody></a:tc><a:tc><a:txBody><a:bodyPr /><a:lstStyle /><a:p><a:pPr lvl="0" indent="0" marL="0"><a:buNone /></a:pPr><a:r><a:rPr /><a:t>observed − predicted</a:t></a:r></a:p></a:txBody></a:tc></a:tr></a:tbl></a:graphicData></a:graphic></p:graphicFrame><mc:AlternateContent xmlns:mc="http://schemas.openxmlformats.org/markup-compatibility/2006"><mc:Choice xmlns:a14="http://schemas.microsoft.com/office/drawing/2010/main" Requires="a14"><p:sp><p:nvSpPr><p:cNvPr id="4" name="Content Placeholder 3" /><p:cNvSpPr><a:spLocks noGrp="1" /></p:cNvSpPr><p:nvPr><p:ph idx="2" sz="half" /></p:nvPr></p:nvSpPr><p:spPr /><p:txBody><a:bodyPr /><a:lstStyle /><a:p><a:pPr lvl="0" indent="0" marL="0"><a:buNone /></a:pPr><a:r><a:rPr b="1" /><a:t>Our equation will be:</a:t></a:r></a:p><a:p><a:pPr lvl="0" indent="0" marL="0"><a:buNone /></a:pPr><a14:m><m:oMathPara xmlns:m="http://schemas.openxmlformats.org/officeDocument/2006/math"><m:oMathParaPr><m:jc m:val="center" /></m:oMathParaPr><m:oMath><m:acc><m:accPr><m:chr m:val="̂" /></m:accPr><m:e><m:r><m:rPr><m:nor /><m:sty m:val="p" /></m:rPr><m:t>area</m:t></m:r></m:e></m:acc><m:r><m:rPr><m:sty m:val="p" /></m:rPr><m:t>=</m:t></m:r><m:r><m:t>a</m:t></m:r><m:r><m:rPr><m:sty m:val="p" /></m:rPr><m:t>+</m:t></m:r><m:r><m:t>b</m:t></m:r><m:r><m:rPr><m:sty m:val="p" /></m:rPr><m:t>×</m:t></m:r><m:r><m:rPr><m:nor /><m:sty m:val="p" /></m:rPr><m:t>mass_g</m:t></m:r></m:oMath></m:oMathPara></a14:m></a:p></p:txBody></p:sp></mc:Choice></mc:AlternateContent><p:sp><p:nvSpPr><p:cNvPr id="5" name="Text Placeholder 4" /><p:cNvSpPr><a:spLocks noGrp="1" /></p:cNvSpPr><p:nvPr><p:ph idx="3" sz="quarter" type="body" /></p:nvPr></p:nvSpPr><p:spPr /><p:txBody><a:bodyPr /><a:lstStyle /><a:p><a:pPr lvl="0" indent="0" marL="0"><a:buNone /></a:pPr><a:r><a:rPr b="1" /><a:t>Interpreting the slope:</a:t></a:r></a:p><a:p><a:pPr lvl="0" indent="0" marL="1270000"><a:buNone /></a:pPr><a:r><a:rPr sz="2000" i="1" /><a:t>b</a:t></a:r><a:r><a:rPr sz="2000" /><a:t> = the change in area (cm²) for every additional 1 gram of paper</a:t></a:r></a:p><a:p><a:pPr lvl="0" indent="0" marL="0"><a:buNone /></a:pPr><a:r><a:rPr /><a:t>Since 1 g ≈ 130 cm² of paper, the slope is the </a:t></a:r><a:r><a:rPr b="1" /><a:t>area density</a:t></a:r><a:r><a:rPr /><a:t> of the paper stock.</a:t></a:r></a:p><a:p><a:pPr lvl="0" indent="0" marL="0"><a:buNone /></a:pPr><a:r><a:rPr b="1" /><a:t>Interpreting the intercept:</a:t></a:r></a:p><a:p><a:pPr lvl="0" indent="0" marL="1270000"><a:buNone /></a:pPr><a:r><a:rPr sz="2000" i="1" /><a:t>a</a:t></a:r><a:r><a:rPr sz="2000" /><a:t> = predicted area when mass = 0</a:t></a:r></a:p><a:p><a:pPr lvl="0" indent="0" marL="0"><a:buNone /></a:pPr><a:r><a:rPr /><a:t>Physically this should be 0 (no paper, no area). Small non-zero values reflect measurement error.</a:t></a:r></a:p><a:p><a:pPr lvl="0" indent="0" marL="0"><a:buNone /></a:pPr><a:r><a:rPr /><a:t>📖 W&amp;S §17.1 pp. 543–545</a:t></a:r></a:p></p:txBody></p:sp></p:spTree></p:cSld></p:sld>
 </file>
 
-<file path=ppt/slides/slide7.xml><?xml version="1.0" encoding="utf-8"?>
+<file path=ppt/slides/slide9.xml><?xml version="1.0" encoding="utf-8"?>
 <p:sld xmlns:a="http://schemas.openxmlformats.org/drawingml/2006/main" xmlns:r="http://schemas.openxmlformats.org/officeDocument/2006/relationships" xmlns:p="http://schemas.openxmlformats.org/presentationml/2006/main">
   <p:cSld>
     <p:spTree>
@@ -15816,954 +18529,6 @@
             <a:r>
               <a:rPr/>
               <a:t> residual. The sum of all residuals = 0.</a:t>
-            </a:r>
-          </a:p>
-        </p:txBody>
-      </p:sp>
-    </p:spTree>
-  </p:cSld>
-</p:sld>
-</file>
-
-<file path=ppt/slides/slide8.xml><?xml version="1.0" encoding="utf-8"?>
-<p:sld xmlns:a="http://schemas.openxmlformats.org/drawingml/2006/main" xmlns:r="http://schemas.openxmlformats.org/officeDocument/2006/relationships" xmlns:p="http://schemas.openxmlformats.org/presentationml/2006/main">
-  <p:cSld>
-    <p:spTree>
-      <p:nvGrpSpPr>
-        <p:cNvPr id="1" name=""/>
-        <p:cNvGrpSpPr/>
-        <p:nvPr/>
-      </p:nvGrpSpPr>
-      <p:grpSpPr>
-        <a:xfrm>
-          <a:off x="0" y="0"/>
-          <a:ext cx="0" cy="0"/>
-          <a:chOff x="0" y="0"/>
-          <a:chExt cx="0" cy="0"/>
-        </a:xfrm>
-      </p:grpSpPr>
-      <p:sp>
-        <p:nvSpPr>
-          <p:cNvPr id="2" name="Title 1"/>
-          <p:cNvSpPr>
-            <a:spLocks noGrp="1"/>
-          </p:cNvSpPr>
-          <p:nvPr>
-            <p:ph type="title"/>
-          </p:nvPr>
-        </p:nvSpPr>
-        <p:spPr>
-          <a:xfrm>
-            <a:off x="139485" y="78119"/>
-            <a:ext cx="8229600" cy="607682"/>
-          </a:xfrm>
-        </p:spPr>
-        <p:txBody>
-          <a:bodyPr/>
-          <a:lstStyle/>
-          <a:p>
-            <a:pPr lvl="0" indent="0" marL="0">
-              <a:buNone/>
-            </a:pPr>
-            <a:r>
-              <a:rPr/>
-              <a:t>R² — How Much Does X Explain?</a:t>
-            </a:r>
-          </a:p>
-        </p:txBody>
-      </p:sp>
-      <mc:AlternateContent xmlns:mc="http://schemas.openxmlformats.org/markup-compatibility/2006">
-        <mc:Choice xmlns:a14="http://schemas.microsoft.com/office/drawing/2010/main" Requires="a14">
-          <p:sp>
-            <p:nvSpPr>
-              <p:cNvPr id="3" name="Text Placeholder 2"/>
-              <p:cNvSpPr>
-                <a:spLocks noGrp="1"/>
-              </p:cNvSpPr>
-              <p:nvPr>
-                <p:ph idx="1" type="body"/>
-              </p:nvPr>
-            </p:nvSpPr>
-            <p:spPr/>
-            <p:txBody>
-              <a:bodyPr/>
-              <a:lstStyle/>
-              <a:p>
-                <a:pPr lvl="0" indent="0" marL="0">
-                  <a:buNone/>
-                </a:pPr>
-                <a14:m>
-                  <m:oMathPara xmlns:m="http://schemas.openxmlformats.org/officeDocument/2006/math">
-                    <m:oMathParaPr>
-                      <m:jc m:val="center"/>
-                    </m:oMathParaPr>
-                    <m:oMath>
-                      <m:sSup>
-                        <m:e>
-                          <m:r>
-                            <m:t>R</m:t>
-                          </m:r>
-                        </m:e>
-                        <m:sup>
-                          <m:r>
-                            <m:t>2</m:t>
-                          </m:r>
-                        </m:sup>
-                      </m:sSup>
-                      <m:r>
-                        <m:rPr>
-                          <m:sty m:val="p"/>
-                        </m:rPr>
-                        <m:t>=</m:t>
-                      </m:r>
-                      <m:f>
-                        <m:fPr>
-                          <m:type m:val="bar"/>
-                        </m:fPr>
-                        <m:num>
-                          <m:r>
-                            <m:t>S</m:t>
-                          </m:r>
-                          <m:sSub>
-                            <m:e>
-                              <m:r>
-                                <m:t>S</m:t>
-                              </m:r>
-                            </m:e>
-                            <m:sub>
-                              <m:r>
-                                <m:rPr>
-                                  <m:nor/>
-                                  <m:sty m:val="p"/>
-                                </m:rPr>
-                                <m:t>regression</m:t>
-                              </m:r>
-                            </m:sub>
-                          </m:sSub>
-                        </m:num>
-                        <m:den>
-                          <m:r>
-                            <m:t>S</m:t>
-                          </m:r>
-                          <m:sSub>
-                            <m:e>
-                              <m:r>
-                                <m:t>S</m:t>
-                              </m:r>
-                            </m:e>
-                            <m:sub>
-                              <m:r>
-                                <m:rPr>
-                                  <m:nor/>
-                                  <m:sty m:val="p"/>
-                                </m:rPr>
-                                <m:t>total</m:t>
-                              </m:r>
-                            </m:sub>
-                          </m:sSub>
-                        </m:den>
-                      </m:f>
-                      <m:r>
-                        <m:rPr>
-                          <m:sty m:val="p"/>
-                        </m:rPr>
-                        <m:t>=</m:t>
-                      </m:r>
-                      <m:r>
-                        <m:t>1</m:t>
-                      </m:r>
-                      <m:r>
-                        <m:rPr>
-                          <m:sty m:val="p"/>
-                        </m:rPr>
-                        <m:t>−</m:t>
-                      </m:r>
-                      <m:f>
-                        <m:fPr>
-                          <m:type m:val="bar"/>
-                        </m:fPr>
-                        <m:num>
-                          <m:r>
-                            <m:t>S</m:t>
-                          </m:r>
-                          <m:sSub>
-                            <m:e>
-                              <m:r>
-                                <m:t>S</m:t>
-                              </m:r>
-                            </m:e>
-                            <m:sub>
-                              <m:r>
-                                <m:rPr>
-                                  <m:nor/>
-                                  <m:sty m:val="p"/>
-                                </m:rPr>
-                                <m:t>residual</m:t>
-                              </m:r>
-                            </m:sub>
-                          </m:sSub>
-                        </m:num>
-                        <m:den>
-                          <m:r>
-                            <m:t>S</m:t>
-                          </m:r>
-                          <m:sSub>
-                            <m:e>
-                              <m:r>
-                                <m:t>S</m:t>
-                              </m:r>
-                            </m:e>
-                            <m:sub>
-                              <m:r>
-                                <m:rPr>
-                                  <m:nor/>
-                                  <m:sty m:val="p"/>
-                                </m:rPr>
-                                <m:t>total</m:t>
-                              </m:r>
-                            </m:sub>
-                          </m:sSub>
-                        </m:den>
-                      </m:f>
-                    </m:oMath>
-                  </m:oMathPara>
-                </a14:m>
-              </a:p>
-              <a:p>
-                <a:pPr lvl="0"/>
-                <a:r>
-                  <a:rPr b="1"/>
-                  <a:t>SS_total</a:t>
-                </a:r>
-                <a:r>
-                  <a:rPr/>
-                  <a:t> = total variation in Y around its mean</a:t>
-                </a:r>
-              </a:p>
-              <a:p>
-                <a:pPr lvl="0"/>
-                <a:r>
-                  <a:rPr b="1"/>
-                  <a:t>SS_regression</a:t>
-                </a:r>
-                <a:r>
-                  <a:rPr/>
-                  <a:t> = variation explained by X</a:t>
-                </a:r>
-              </a:p>
-              <a:p>
-                <a:pPr lvl="0"/>
-                <a:r>
-                  <a:rPr b="1"/>
-                  <a:t>SS_residual</a:t>
-                </a:r>
-                <a:r>
-                  <a:rPr/>
-                  <a:t> = variation </a:t>
-                </a:r>
-                <a:r>
-                  <a:rPr i="1"/>
-                  <a:t>not</a:t>
-                </a:r>
-                <a:r>
-                  <a:rPr/>
-                  <a:t> explained (scatter around the line)</a:t>
-                </a:r>
-              </a:p>
-              <a:p>
-                <a:pPr lvl="0" indent="0" marL="0">
-                  <a:buNone/>
-                </a:pPr>
-                <a:r>
-                  <a:rPr/>
-                  <a:t>R² ranges from 0 to 1:</a:t>
-                </a:r>
-              </a:p>
-            </p:txBody>
-          </p:sp>
-        </mc:Choice>
-      </mc:AlternateContent>
-      <p:graphicFrame>
-        <p:nvGraphicFramePr>
-          <p:cNvPr id="6" name="Content Placeholder 5"/>
-          <p:cNvGraphicFramePr>
-            <a:graphicFrameLocks noGrp="1"/>
-          </p:cNvGraphicFramePr>
-          <p:nvPr>
-            <p:ph idx="1"/>
-          </p:nvPr>
-        </p:nvGraphicFramePr>
-        <p:xfrm>
-          <a:off x="127000" y="1270000"/>
-          <a:ext cx="4432300" cy="3302000"/>
-        </p:xfrm>
-        <a:graphic>
-          <a:graphicData uri="http://schemas.openxmlformats.org/drawingml/2006/table">
-            <a:tbl>
-              <a:tblPr firstRow="1" bandRow="1">
-                <a:tableStyleId>{5C22544A-7EE6-4342-B048-85BDC9FD1C3A}</a:tableStyleId>
-              </a:tblPr>
-              <a:tblGrid>
-                <a:gridCol w="2209800"/>
-                <a:gridCol w="2209800"/>
-              </a:tblGrid>
-              <a:tr h="0">
-                <a:tc>
-                  <a:txBody>
-                    <a:bodyPr/>
-                    <a:lstStyle/>
-                    <a:p>
-                      <a:pPr lvl="0" indent="0" marL="0">
-                        <a:buNone/>
-                      </a:pPr>
-                      <a:r>
-                        <a:rPr/>
-                        <a:t>R²</a:t>
-                      </a:r>
-                    </a:p>
-                  </a:txBody>
-                  <a:tcPr/>
-                </a:tc>
-                <a:tc>
-                  <a:txBody>
-                    <a:bodyPr/>
-                    <a:lstStyle/>
-                    <a:p>
-                      <a:pPr lvl="0" indent="0" marL="0">
-                        <a:buNone/>
-                      </a:pPr>
-                      <a:r>
-                        <a:rPr/>
-                        <a:t>Interpretation</a:t>
-                      </a:r>
-                    </a:p>
-                  </a:txBody>
-                  <a:tcPr/>
-                </a:tc>
-              </a:tr>
-              <a:tr h="0">
-                <a:tc>
-                  <a:txBody>
-                    <a:bodyPr/>
-                    <a:lstStyle/>
-                    <a:p>
-                      <a:pPr lvl="0" indent="0" marL="0">
-                        <a:buNone/>
-                      </a:pPr>
-                      <a:r>
-                        <a:rPr/>
-                        <a:t>1.00</a:t>
-                      </a:r>
-                    </a:p>
-                  </a:txBody>
-                </a:tc>
-                <a:tc>
-                  <a:txBody>
-                    <a:bodyPr/>
-                    <a:lstStyle/>
-                    <a:p>
-                      <a:pPr lvl="0" indent="0" marL="0">
-                        <a:buNone/>
-                      </a:pPr>
-                      <a:r>
-                        <a:rPr/>
-                        <a:t>X explains all variation in Y</a:t>
-                      </a:r>
-                    </a:p>
-                  </a:txBody>
-                </a:tc>
-              </a:tr>
-              <a:tr h="0">
-                <a:tc>
-                  <a:txBody>
-                    <a:bodyPr/>
-                    <a:lstStyle/>
-                    <a:p>
-                      <a:pPr lvl="0" indent="0" marL="0">
-                        <a:buNone/>
-                      </a:pPr>
-                      <a:r>
-                        <a:rPr/>
-                        <a:t>0.85</a:t>
-                      </a:r>
-                    </a:p>
-                  </a:txBody>
-                </a:tc>
-                <a:tc>
-                  <a:txBody>
-                    <a:bodyPr/>
-                    <a:lstStyle/>
-                    <a:p>
-                      <a:pPr lvl="0" indent="0" marL="0">
-                        <a:buNone/>
-                      </a:pPr>
-                      <a:r>
-                        <a:rPr/>
-                        <a:t>X explains 85% of variation</a:t>
-                      </a:r>
-                    </a:p>
-                  </a:txBody>
-                </a:tc>
-              </a:tr>
-              <a:tr h="0">
-                <a:tc>
-                  <a:txBody>
-                    <a:bodyPr/>
-                    <a:lstStyle/>
-                    <a:p>
-                      <a:pPr lvl="0" indent="0" marL="0">
-                        <a:buNone/>
-                      </a:pPr>
-                      <a:r>
-                        <a:rPr/>
-                        <a:t>0.00</a:t>
-                      </a:r>
-                    </a:p>
-                  </a:txBody>
-                </a:tc>
-                <a:tc>
-                  <a:txBody>
-                    <a:bodyPr/>
-                    <a:lstStyle/>
-                    <a:p>
-                      <a:pPr lvl="0" indent="0" marL="0">
-                        <a:buNone/>
-                      </a:pPr>
-                      <a:r>
-                        <a:rPr/>
-                        <a:t>X explains nothing</a:t>
-                      </a:r>
-                    </a:p>
-                  </a:txBody>
-                </a:tc>
-              </a:tr>
-            </a:tbl>
-          </a:graphicData>
-        </a:graphic>
-      </p:graphicFrame>
-      <p:sp>
-        <p:nvSpPr>
-          <p:cNvPr id="4" name="Content Placeholder 3"/>
-          <p:cNvSpPr>
-            <a:spLocks noGrp="1"/>
-          </p:cNvSpPr>
-          <p:nvPr>
-            <p:ph idx="2" sz="half"/>
-          </p:nvPr>
-        </p:nvSpPr>
-        <p:spPr/>
-        <p:txBody>
-          <a:bodyPr/>
-          <a:lstStyle/>
-          <a:p>
-            <a:pPr lvl="0" indent="0" marL="0">
-              <a:buNone/>
-            </a:pPr>
-            <a:r>
-              <a:rPr/>
-              <a:t>📖 W&amp;S §17.4 p. 555</a:t>
-            </a:r>
-          </a:p>
-        </p:txBody>
-      </p:sp>
-      <p:sp>
-        <p:nvSpPr>
-          <p:cNvPr id="5" name="Text Placeholder 4"/>
-          <p:cNvSpPr>
-            <a:spLocks noGrp="1"/>
-          </p:cNvSpPr>
-          <p:nvPr>
-            <p:ph idx="3" sz="quarter" type="body"/>
-          </p:nvPr>
-        </p:nvSpPr>
-        <p:spPr/>
-        <p:txBody>
-          <a:bodyPr/>
-          <a:lstStyle/>
-          <a:p>
-            <a:pPr lvl="0" indent="0" marL="0">
-              <a:buNone/>
-            </a:pPr>
-            <a:r>
-              <a:rPr b="1"/>
-              <a:t>Our calibration data:</a:t>
-            </a:r>
-          </a:p>
-          <a:p>
-            <a:pPr lvl="0" indent="0" marL="0">
-              <a:buNone/>
-            </a:pPr>
-            <a:r>
-              <a:rPr/>
-              <a:t>Because paper has uniform density, mass and area are nearly perfectly linearly related.</a:t>
-            </a:r>
-          </a:p>
-          <a:p>
-            <a:pPr lvl="0" indent="0" marL="0">
-              <a:buNone/>
-            </a:pPr>
-            <a:r>
-              <a:rPr/>
-              <a:t>We expect R² ≈ 1.00.</a:t>
-            </a:r>
-          </a:p>
-          <a:p>
-            <a:pPr lvl="0" indent="0" marL="0">
-              <a:buNone/>
-            </a:pPr>
-            <a:r>
-              <a:rPr b="1"/>
-              <a:t>Important:</a:t>
-            </a:r>
-            <a:r>
-              <a:rPr/>
-              <a:t> R² tells you </a:t>
-            </a:r>
-            <a:r>
-              <a:rPr i="1"/>
-              <a:t>how well the line fits</a:t>
-            </a:r>
-            <a:r>
-              <a:rPr/>
-              <a:t> the data you have. It does not by itself tell you whether the relationship is statistically significant — that requires a test of the slope.</a:t>
-            </a:r>
-          </a:p>
-          <a:p>
-            <a:pPr lvl="0" indent="0" marL="0">
-              <a:buNone/>
-            </a:pPr>
-            <a:r>
-              <a:rPr/>
-              <a:t>A significant slope with a low R² is possible (weak but real relationship). In biology, R² values of 0.3–0.7 are common and meaningful.</a:t>
-            </a:r>
-          </a:p>
-        </p:txBody>
-      </p:sp>
-    </p:spTree>
-  </p:cSld>
-</p:sld>
-</file>
-
-<file path=ppt/slides/slide9.xml><?xml version="1.0" encoding="utf-8"?>
-<p:sld xmlns:a="http://schemas.openxmlformats.org/drawingml/2006/main" xmlns:r="http://schemas.openxmlformats.org/officeDocument/2006/relationships" xmlns:p="http://schemas.openxmlformats.org/presentationml/2006/main">
-  <p:cSld>
-    <p:spTree>
-      <p:nvGrpSpPr>
-        <p:cNvPr id="1" name=""/>
-        <p:cNvGrpSpPr/>
-        <p:nvPr/>
-      </p:nvGrpSpPr>
-      <p:grpSpPr>
-        <a:xfrm>
-          <a:off x="0" y="0"/>
-          <a:ext cx="0" cy="0"/>
-          <a:chOff x="0" y="0"/>
-          <a:chExt cx="0" cy="0"/>
-        </a:xfrm>
-      </p:grpSpPr>
-      <p:sp>
-        <p:nvSpPr>
-          <p:cNvPr id="2" name="Title 1"/>
-          <p:cNvSpPr>
-            <a:spLocks noGrp="1"/>
-          </p:cNvSpPr>
-          <p:nvPr>
-            <p:ph type="title"/>
-          </p:nvPr>
-        </p:nvSpPr>
-        <p:spPr>
-          <a:xfrm>
-            <a:off x="139485" y="78119"/>
-            <a:ext cx="8229600" cy="607682"/>
-          </a:xfrm>
-        </p:spPr>
-        <p:txBody>
-          <a:bodyPr/>
-          <a:lstStyle/>
-          <a:p>
-            <a:pPr lvl="0" indent="0" marL="0">
-              <a:buNone/>
-            </a:pPr>
-            <a:r>
-              <a:rPr/>
-              <a:t>Assumptions of Regression</a:t>
-            </a:r>
-          </a:p>
-        </p:txBody>
-      </p:sp>
-      <p:sp>
-        <p:nvSpPr>
-          <p:cNvPr id="3" name="Text Placeholder 2"/>
-          <p:cNvSpPr>
-            <a:spLocks noGrp="1"/>
-          </p:cNvSpPr>
-          <p:nvPr>
-            <p:ph idx="1" type="body"/>
-          </p:nvPr>
-        </p:nvSpPr>
-        <p:spPr/>
-        <p:txBody>
-          <a:bodyPr/>
-          <a:lstStyle/>
-          <a:p>
-            <a:pPr lvl="0" indent="0" marL="0">
-              <a:buNone/>
-            </a:pPr>
-            <a:r>
-              <a:rPr/>
-              <a:t>Four assumptions must hold for the p-value and confidence intervals to be valid (W&amp;S §17.5):</a:t>
-            </a:r>
-          </a:p>
-        </p:txBody>
-      </p:sp>
-      <p:graphicFrame>
-        <p:nvGraphicFramePr>
-          <p:cNvPr id="6" name="Content Placeholder 5"/>
-          <p:cNvGraphicFramePr>
-            <a:graphicFrameLocks noGrp="1"/>
-          </p:cNvGraphicFramePr>
-          <p:nvPr>
-            <p:ph idx="1"/>
-          </p:nvPr>
-        </p:nvGraphicFramePr>
-        <p:xfrm>
-          <a:off x="127000" y="1270000"/>
-          <a:ext cx="4432300" cy="3302000"/>
-        </p:xfrm>
-        <a:graphic>
-          <a:graphicData uri="http://schemas.openxmlformats.org/drawingml/2006/table">
-            <a:tbl>
-              <a:tblPr firstRow="1" bandRow="1">
-                <a:tableStyleId>{5C22544A-7EE6-4342-B048-85BDC9FD1C3A}</a:tableStyleId>
-              </a:tblPr>
-              <a:tblGrid>
-                <a:gridCol w="1473200"/>
-                <a:gridCol w="1473200"/>
-                <a:gridCol w="1473200"/>
-              </a:tblGrid>
-              <a:tr h="0">
-                <a:tc>
-                  <a:txBody>
-                    <a:bodyPr/>
-                    <a:lstStyle/>
-                    <a:p>
-                      <a:pPr lvl="0" indent="0" marL="0">
-                        <a:buNone/>
-                      </a:pPr>
-                      <a:r>
-                        <a:rPr/>
-                        <a:t>#</a:t>
-                      </a:r>
-                    </a:p>
-                  </a:txBody>
-                  <a:tcPr/>
-                </a:tc>
-                <a:tc>
-                  <a:txBody>
-                    <a:bodyPr/>
-                    <a:lstStyle/>
-                    <a:p>
-                      <a:pPr lvl="0" indent="0" marL="0">
-                        <a:buNone/>
-                      </a:pPr>
-                      <a:r>
-                        <a:rPr/>
-                        <a:t>Assumption</a:t>
-                      </a:r>
-                    </a:p>
-                  </a:txBody>
-                  <a:tcPr/>
-                </a:tc>
-                <a:tc>
-                  <a:txBody>
-                    <a:bodyPr/>
-                    <a:lstStyle/>
-                    <a:p>
-                      <a:pPr lvl="0" indent="0" marL="0">
-                        <a:buNone/>
-                      </a:pPr>
-                      <a:r>
-                        <a:rPr/>
-                        <a:t>How to check</a:t>
-                      </a:r>
-                    </a:p>
-                  </a:txBody>
-                  <a:tcPr/>
-                </a:tc>
-              </a:tr>
-              <a:tr h="0">
-                <a:tc>
-                  <a:txBody>
-                    <a:bodyPr/>
-                    <a:lstStyle/>
-                    <a:p>
-                      <a:pPr lvl="0" indent="0" marL="0">
-                        <a:buNone/>
-                      </a:pPr>
-                      <a:r>
-                        <a:rPr/>
-                        <a:t>1</a:t>
-                      </a:r>
-                    </a:p>
-                  </a:txBody>
-                </a:tc>
-                <a:tc>
-                  <a:txBody>
-                    <a:bodyPr/>
-                    <a:lstStyle/>
-                    <a:p>
-                      <a:pPr lvl="0" indent="0" marL="0">
-                        <a:buNone/>
-                      </a:pPr>
-                      <a:r>
-                        <a:rPr b="1"/>
-                        <a:t>Linearity</a:t>
-                      </a:r>
-                      <a:r>
-                        <a:rPr/>
-                        <a:t> — Y changes linearly with X</a:t>
-                      </a:r>
-                    </a:p>
-                  </a:txBody>
-                </a:tc>
-                <a:tc>
-                  <a:txBody>
-                    <a:bodyPr/>
-                    <a:lstStyle/>
-                    <a:p>
-                      <a:pPr lvl="0" indent="0" marL="0">
-                        <a:buNone/>
-                      </a:pPr>
-                      <a:r>
-                        <a:rPr/>
-                        <a:t>Residual vs. fitted plot</a:t>
-                      </a:r>
-                    </a:p>
-                  </a:txBody>
-                </a:tc>
-              </a:tr>
-              <a:tr h="0">
-                <a:tc>
-                  <a:txBody>
-                    <a:bodyPr/>
-                    <a:lstStyle/>
-                    <a:p>
-                      <a:pPr lvl="0" indent="0" marL="0">
-                        <a:buNone/>
-                      </a:pPr>
-                      <a:r>
-                        <a:rPr/>
-                        <a:t>2</a:t>
-                      </a:r>
-                    </a:p>
-                  </a:txBody>
-                </a:tc>
-                <a:tc>
-                  <a:txBody>
-                    <a:bodyPr/>
-                    <a:lstStyle/>
-                    <a:p>
-                      <a:pPr lvl="0" indent="0" marL="0">
-                        <a:buNone/>
-                      </a:pPr>
-                      <a:r>
-                        <a:rPr b="1"/>
-                        <a:t>Independence</a:t>
-                      </a:r>
-                      <a:r>
-                        <a:rPr/>
-                        <a:t> — observations are independent</a:t>
-                      </a:r>
-                    </a:p>
-                  </a:txBody>
-                </a:tc>
-                <a:tc>
-                  <a:txBody>
-                    <a:bodyPr/>
-                    <a:lstStyle/>
-                    <a:p>
-                      <a:pPr lvl="0" indent="0" marL="0">
-                        <a:buNone/>
-                      </a:pPr>
-                      <a:r>
-                        <a:rPr/>
-                        <a:t>Study design</a:t>
-                      </a:r>
-                    </a:p>
-                  </a:txBody>
-                </a:tc>
-              </a:tr>
-              <a:tr h="0">
-                <a:tc>
-                  <a:txBody>
-                    <a:bodyPr/>
-                    <a:lstStyle/>
-                    <a:p>
-                      <a:pPr lvl="0" indent="0" marL="0">
-                        <a:buNone/>
-                      </a:pPr>
-                      <a:r>
-                        <a:rPr/>
-                        <a:t>3</a:t>
-                      </a:r>
-                    </a:p>
-                  </a:txBody>
-                </a:tc>
-                <a:tc>
-                  <a:txBody>
-                    <a:bodyPr/>
-                    <a:lstStyle/>
-                    <a:p>
-                      <a:pPr lvl="0" indent="0" marL="0">
-                        <a:buNone/>
-                      </a:pPr>
-                      <a:r>
-                        <a:rPr b="1"/>
-                        <a:t>Equal variance</a:t>
-                      </a:r>
-                      <a:r>
-                        <a:rPr/>
-                        <a:t> — spread of residuals is constant</a:t>
-                      </a:r>
-                    </a:p>
-                  </a:txBody>
-                </a:tc>
-                <a:tc>
-                  <a:txBody>
-                    <a:bodyPr/>
-                    <a:lstStyle/>
-                    <a:p>
-                      <a:pPr lvl="0" indent="0" marL="0">
-                        <a:buNone/>
-                      </a:pPr>
-                      <a:r>
-                        <a:rPr/>
-                        <a:t>Residual vs. fitted plot</a:t>
-                      </a:r>
-                    </a:p>
-                  </a:txBody>
-                </a:tc>
-              </a:tr>
-              <a:tr h="0">
-                <a:tc>
-                  <a:txBody>
-                    <a:bodyPr/>
-                    <a:lstStyle/>
-                    <a:p>
-                      <a:pPr lvl="0" indent="0" marL="0">
-                        <a:buNone/>
-                      </a:pPr>
-                      <a:r>
-                        <a:rPr/>
-                        <a:t>4</a:t>
-                      </a:r>
-                    </a:p>
-                  </a:txBody>
-                </a:tc>
-                <a:tc>
-                  <a:txBody>
-                    <a:bodyPr/>
-                    <a:lstStyle/>
-                    <a:p>
-                      <a:pPr lvl="0" indent="0" marL="0">
-                        <a:buNone/>
-                      </a:pPr>
-                      <a:r>
-                        <a:rPr b="1"/>
-                        <a:t>Normality</a:t>
-                      </a:r>
-                      <a:r>
-                        <a:rPr/>
-                        <a:t> — residuals are normally distributed</a:t>
-                      </a:r>
-                    </a:p>
-                  </a:txBody>
-                </a:tc>
-                <a:tc>
-                  <a:txBody>
-                    <a:bodyPr/>
-                    <a:lstStyle/>
-                    <a:p>
-                      <a:pPr lvl="0" indent="0" marL="0">
-                        <a:buNone/>
-                      </a:pPr>
-                      <a:r>
-                        <a:rPr/>
-                        <a:t>QQ plot + Shapiro-Wilk</a:t>
-                      </a:r>
-                    </a:p>
-                  </a:txBody>
-                </a:tc>
-              </a:tr>
-            </a:tbl>
-          </a:graphicData>
-        </a:graphic>
-      </p:graphicFrame>
-      <p:sp>
-        <p:nvSpPr>
-          <p:cNvPr id="5" name="Text Placeholder 4"/>
-          <p:cNvSpPr>
-            <a:spLocks noGrp="1"/>
-          </p:cNvSpPr>
-          <p:nvPr>
-            <p:ph idx="3" sz="quarter" type="body"/>
-          </p:nvPr>
-        </p:nvSpPr>
-        <p:spPr/>
-        <p:txBody>
-          <a:bodyPr/>
-          <a:lstStyle/>
-          <a:p>
-            <a:pPr lvl="0" indent="0" marL="1270000">
-              <a:buNone/>
-            </a:pPr>
-            <a:r>
-              <a:rPr sz="2000" b="1"/>
-              <a:t>Important</a:t>
-            </a:r>
-          </a:p>
-          <a:p>
-            <a:pPr lvl="0" indent="0" marL="1270000">
-              <a:buNone/>
-            </a:pPr>
-            <a:r>
-              <a:rPr sz="2000" b="1"/>
-              <a:t>Check residuals, not raw data.</a:t>
-            </a:r>
-          </a:p>
-          <a:p>
-            <a:pPr lvl="0" indent="0" marL="1270000">
-              <a:buNone/>
-            </a:pPr>
-            <a:r>
-              <a:rPr sz="2000"/>
-              <a:t>The normality assumption is about the </a:t>
-            </a:r>
-            <a:r>
-              <a:rPr sz="2000" b="1"/>
-              <a:t>residuals</a:t>
-            </a:r>
-            <a:r>
-              <a:rPr sz="2000"/>
-              <a:t> (observed − predicted), not the original Y values.</a:t>
-            </a:r>
-          </a:p>
-          <a:p>
-            <a:pPr lvl="0" indent="0" marL="1270000">
-              <a:buNone/>
-            </a:pPr>
-            <a:r>
-              <a:rPr sz="2000"/>
-              <a:t>A well-fitted residual plot looks like a random horizontal cloud of points centered at zero — no curves, no funnel shapes.</a:t>
-            </a:r>
-          </a:p>
-          <a:p>
-            <a:pPr lvl="0" indent="0" marL="0">
-              <a:buNone/>
-            </a:pPr>
-            <a:r>
-              <a:rPr/>
-              <a:t>📖 W&amp;S §17.5 pp. 557–560 (Figures 17.5-1, 17.5-4)</a:t>
             </a:r>
           </a:p>
         </p:txBody>
